--- a/pptx/baslangic3.pptx
+++ b/pptx/baslangic3.pptx
@@ -5,21 +5,21 @@
     <p:sldMasterId id="2147483648" r:id="rId1"/>
   </p:sldMasterIdLst>
   <p:notesMasterIdLst>
-    <p:notesMasterId r:id="rId13"/>
+    <p:notesMasterId r:id="rId14"/>
   </p:notesMasterIdLst>
   <p:sldIdLst>
     <p:sldId id="256" r:id="rId2"/>
-    <p:sldId id="268" r:id="rId19"/>
-    <p:sldId id="257" r:id="rId3"/>
-    <p:sldId id="258" r:id="rId4"/>
-    <p:sldId id="259" r:id="rId5"/>
-    <p:sldId id="260" r:id="rId6"/>
-    <p:sldId id="263" r:id="rId7"/>
-    <p:sldId id="261" r:id="rId8"/>
-    <p:sldId id="262" r:id="rId9"/>
-    <p:sldId id="265" r:id="rId10"/>
-    <p:sldId id="266" r:id="rId11"/>
-    <p:sldId id="267" r:id="rId12"/>
+    <p:sldId id="268" r:id="rId3"/>
+    <p:sldId id="257" r:id="rId4"/>
+    <p:sldId id="258" r:id="rId5"/>
+    <p:sldId id="259" r:id="rId6"/>
+    <p:sldId id="260" r:id="rId7"/>
+    <p:sldId id="263" r:id="rId8"/>
+    <p:sldId id="261" r:id="rId9"/>
+    <p:sldId id="262" r:id="rId10"/>
+    <p:sldId id="265" r:id="rId11"/>
+    <p:sldId id="266" r:id="rId12"/>
+    <p:sldId id="267" r:id="rId13"/>
   </p:sldIdLst>
   <p:sldSz cx="9144000" cy="5143500" type="screen16x9"/>
   <p:notesSz cx="5143500" cy="9144000"/>
@@ -448,7 +448,7 @@
           <a:p>
             <a:r>
               <a:rPr lang="en-US" dirty="0"/>
-              <a:t>Öğrencilerin görev heyecanıyla ayrılmasını sağla. 'Bugün öğrendiklerini kuzenlerinle dene!' de. 'Bir sonraki görevde görüşürüz!' diyebilirsin.</a:t>
+              <a:t>Basit bir örnek ver: 'Ayşe 7 yaşında. Fatma 17 yaşında. Hüseyin de 17 yaşında.' de. 'Ayşe, Fatma'ya nasıl seslenir?' diye sor, bekle. 'Fatma Abla der, çünkü Fatma büyük.' de. 'Peki Ayşe, Hüseyin'e nasıl seslenir?' diye sor, bekle. 'Hüseyin Abi der, çünkü Hüseyin de ondan büyük.' de. 'Peki Fatma, Hüseyin'e nasıl seslenir?' diye sor, bekle. 'Sadece Hüseyin der, çünkü ikisi aynı yaşta, akran.' de. Bunu basit ve yavaş anlat.</a:t>
             </a:r>
           </a:p>
         </p:txBody>
@@ -535,7 +535,7 @@
           <a:p>
             <a:r>
               <a:rPr lang="en-US" dirty="0"/>
-              <a:t>'Görev tamamlandı dedektifim! Bugün sayıları öğrendin. Yaşını söylemeyi öğrendin.' de. 'Bir sonraki görevde görüşürüz, hoşça kal!' diyerek kapat.</a:t>
+              <a:t>Öğrencilerin görev heyecanıyla ayrılmasını sağla. 'Bugün öğrendiklerini kuzenlerinle dene!' de. 'Bir sonraki görevde görüşürüz!' diyebilirsin.</a:t>
             </a:r>
           </a:p>
         </p:txBody>
@@ -622,7 +622,7 @@
           <a:p>
             <a:r>
               <a:rPr lang="en-US" dirty="0"/>
-              <a:t>'Bugün üç görevimiz var!' de. Kartları sırayla göster: 'Bir: 1'den 20'ye kadar sayacağız. İki: Kaç yaşındasın diye sorup yaşımızı söyleyeceğiz. Üç: İyi ki doğdun diyerek doğum günü kutlayacağız.' Sonra 'Hazır mısın?' diye sor, öğrenci 'Hazırım!' desin, bir sonraki slayta geç.</a:t>
+              <a:t>'Görev tamamlandı dedektifim! Bugün sayıları öğrendin. Yaşını söylemeyi öğrendin.' de. 'Bir sonraki görevde görüşürüz, hoşça kal!' diyerek kapat.</a:t>
             </a:r>
           </a:p>
         </p:txBody>
@@ -644,7 +644,7 @@
           <a:p>
             <a:fld id="{F7021451-1387-4CA6-816F-3879F97B5CBC}" type="slidenum">
               <a:rPr lang="en-US"/>
-              <a:t>2</a:t>
+              <a:t>12</a:t>
             </a:fld>
             <a:endParaRPr lang="en-US"/>
           </a:p>
@@ -653,7 +653,7 @@
     </p:spTree>
     <p:extLst>
       <p:ext uri="{BB962C8B-B14F-4D97-AF65-F5344CB8AC3E}">
-        <p14:creationId xmlns:p14="http://schemas.microsoft.com/office/powerpoint/2010/main" val="1024086999"/>
+        <p14:creationId xmlns:p14="http://schemas.microsoft.com/office/powerpoint/2010/main" val="1024086991"/>
       </p:ext>
     </p:extLst>
   </p:cSld>
@@ -709,7 +709,7 @@
           <a:p>
             <a:r>
               <a:rPr lang="en-US" dirty="0"/>
-              <a:t>'Bugün benim doğum günüm!' de. Öğrenci 'İyi ki doğdun!' desin diye bekle, gerekirse rozeti göster. 'Teşekkürler! Peki ben kaç yaşındayım? Mumlara bakalım, birlikte sayalım!' de.</a:t>
+              <a:t>'Bugün üç görevimiz var!' de. Kartları sırayla göster: 'Bir: 1'den 20'ye kadar sayacağız. İki: Kaç yaşındasın diye sorup yaşımızı söyleyeceğiz. Üç: İyi ki doğdun diyerek doğum günü kutlayacağız.' Sonra 'Hazır mısın?' diye sor, öğrenci 'Hazırım!' desin, bir sonraki slayta geç.</a:t>
             </a:r>
           </a:p>
         </p:txBody>
@@ -740,7 +740,7 @@
     </p:spTree>
     <p:extLst>
       <p:ext uri="{BB962C8B-B14F-4D97-AF65-F5344CB8AC3E}">
-        <p14:creationId xmlns:p14="http://schemas.microsoft.com/office/powerpoint/2010/main" val="1024086991"/>
+        <p14:creationId xmlns:p14="http://schemas.microsoft.com/office/powerpoint/2010/main" val="1024086999"/>
       </p:ext>
     </p:extLst>
   </p:cSld>
@@ -796,7 +796,7 @@
           <a:p>
             <a:r>
               <a:rPr lang="en-US" dirty="0"/>
-              <a:t>'Mumları birlikte sayalım! Ekrana bak ve tekrar et: Bir... iki... üç... dört... beş...' de, 10'a kadar devam et. Her sayıdan sonra kısa bir duraklama bırak. Mum sayma oyunu gibi yap.</a:t>
+              <a:t>'Bugün benim doğum günüm!' de. Öğrenci 'İyi ki doğdun!' desin diye bekle, gerekirse rozeti göster. 'Teşekkürler! Peki ben kaç yaşındayım? Mumlara bakalım, birlikte sayalım!' de.</a:t>
             </a:r>
           </a:p>
         </p:txBody>
@@ -883,7 +883,7 @@
           <a:p>
             <a:r>
               <a:rPr lang="en-US" dirty="0"/>
-              <a:t>'Şimdi biraz daha zorlayalım: On bir... on iki... on üç...' de, 20'ye kadar devam et. '13' özellikle önemli — bu derste yaş örneği olarak kullanılacak, biraz daha vurgulu söyle.</a:t>
+              <a:t>'Mumları birlikte sayalım! Ekrana bak ve tekrar et: Bir... iki... üç... dört... beş...' de, 10'a kadar devam et. Her sayıdan sonra kısa bir duraklama bırak. Mum sayma oyunu gibi yap.</a:t>
             </a:r>
           </a:p>
         </p:txBody>
@@ -970,7 +970,7 @@
           <a:p>
             <a:r>
               <a:rPr lang="en-US" dirty="0"/>
-              <a:t>'Mumları saydık! On üç tane mum vardı. Demek ki ben on üç yaşındayım!' de. 'Ben' de, bekle. 'On üç' de, bekle. 'Yaşındayım' de, bekle. 'Şimdi birleştir: Ben on üç yaşındayım!' de. Sonra 'Harika! Şimdi kendi yaşını koyarak söyle.' de.</a:t>
+              <a:t>'Şimdi biraz daha zorlayalım: On bir... on iki... on üç...' de, 20'ye kadar devam et. '13' özellikle önemli — bu derste yaş örneği olarak kullanılacak, biraz daha vurgulu söyle.</a:t>
             </a:r>
           </a:p>
         </p:txBody>
@@ -1057,7 +1057,7 @@
           <a:p>
             <a:r>
               <a:rPr lang="en-US" dirty="0"/>
-              <a:t>'Ekrana karışık sayılar gelecek. Hemen Türkçe söyle!' de. '15... 8... 20!' her birinden sonra duraklat. 'Çok hızlısın!' diyerek kutla.</a:t>
+              <a:t>'Mumları saydık! On üç tane mum vardı. Demek ki ben on üç yaşındayım!' de. 'Ben' de, bekle. 'On üç' de, bekle. 'Yaşındayım' de, bekle. 'Şimdi birleştir: Ben on üç yaşındayım!' de. Sonra 'Harika! Şimdi kendi yaşını koyarak söyle.' de.</a:t>
             </a:r>
           </a:p>
         </p:txBody>
@@ -1144,7 +1144,7 @@
           <a:p>
             <a:r>
               <a:rPr lang="en-US" dirty="0"/>
-              <a:t>'Arkadaşına sormak için şunu kullan: Sen kaç yaşındasın?' de, yavaş ve heceli söyle. Bekle, öğrenci tekrar etsin. Bir daha söylet. 'Harika! Şimdi bunu bir arkadaşına sorabilirsin.' de.</a:t>
+              <a:t>'Ekrana karışık sayılar gelecek. Hemen Türkçe söyle!' de. '15... 8... 20!' her birinden sonra duraklat. 'Çok hızlısın!' diyerek kutla.</a:t>
             </a:r>
           </a:p>
         </p:txBody>
@@ -1231,7 +1231,7 @@
           <a:p>
             <a:r>
               <a:rPr lang="en-US" dirty="0"/>
-              <a:t>'Birinin doğum günü mü? O zaman en sevdiğimiz iki cümleyi söyleyelim: İyi ki doğdun!' de, bekle. 'Doğum günün kutlu olsun!' de, bekle. 'Harika, artık bir kutlama uzmanısın!' de.</a:t>
+              <a:t>'Arkadaşına sormak için şunu kullan: Sen kaç yaşındasın?' de, yavaş ve heceli söyle. Bekle, öğrenci tekrar etsin. Bir daha söylet. 'Harika! Şimdi bunu bir arkadaşına sorabilirsin.' de.</a:t>
             </a:r>
           </a:p>
         </p:txBody>
@@ -1318,7 +1318,7 @@
           <a:p>
             <a:r>
               <a:rPr lang="en-US" dirty="0"/>
-              <a:t>Basit bir örnek ver: 'Ayşe 7 yaşında. Fatma 17 yaşında. Hüseyin de 17 yaşında.' de. 'Ayşe, Fatma'ya nasıl seslenir?' diye sor, bekle. 'Fatma Abla der, çünkü Fatma büyük.' de. 'Peki Ayşe, Hüseyin'e nasıl seslenir?' diye sor, bekle. 'Hüseyin Abi der, çünkü Hüseyin de ondan büyük.' de. 'Peki Fatma, Hüseyin'e nasıl seslenir?' diye sor, bekle. 'Sadece Hüseyin der, çünkü ikisi aynı yaşta, akran.' de. Bunu basit ve yavaş anlat.</a:t>
+              <a:t>'Birinin doğum günü mü? O zaman en sevdiğimiz iki cümleyi söyleyelim: İyi ki doğdun!' de, bekle. 'Doğum günün kutlu olsun!' de, bekle. 'Harika, artık bir kutlama uzmanısın!' de.</a:t>
             </a:r>
           </a:p>
         </p:txBody>
@@ -1726,7 +1726,7 @@
                   <a:srgbClr val="000000"/>
                 </a:solidFill>
               </a:rPr>
-              <a:t xml:space="preserve">    </a:t>
+              <a:t>    </a:t>
             </a:r>
             <a:endParaRPr lang="en-US" sz="1800" dirty="0"/>
           </a:p>
@@ -1741,7 +1741,7 @@
           <p:nvPr/>
         </p:nvPicPr>
         <p:blipFill>
-          <a:blip r:embed="rId100"/>
+          <a:blip r:embed="rId3"/>
           <a:stretch>
             <a:fillRect/>
           </a:stretch>
@@ -1786,7 +1786,7 @@
                   <a:srgbClr val="000000"/>
                 </a:solidFill>
               </a:rPr>
-              <a:t xml:space="preserve">    </a:t>
+              <a:t>    </a:t>
             </a:r>
             <a:endParaRPr lang="en-US" sz="1800" dirty="0"/>
           </a:p>
@@ -1801,7 +1801,7 @@
           <p:nvPr/>
         </p:nvPicPr>
         <p:blipFill>
-          <a:blip r:embed="rId100"/>
+          <a:blip r:embed="rId3"/>
           <a:stretch>
             <a:fillRect/>
           </a:stretch>
@@ -1846,7 +1846,7 @@
                   <a:srgbClr val="000000"/>
                 </a:solidFill>
               </a:rPr>
-              <a:t xml:space="preserve">    </a:t>
+              <a:t>    </a:t>
             </a:r>
             <a:endParaRPr lang="en-US" sz="1800" dirty="0"/>
           </a:p>
@@ -1861,7 +1861,7 @@
           <p:nvPr/>
         </p:nvPicPr>
         <p:blipFill>
-          <a:blip r:embed="rId100"/>
+          <a:blip r:embed="rId3"/>
           <a:stretch>
             <a:fillRect/>
           </a:stretch>
@@ -1906,7 +1906,7 @@
                   <a:srgbClr val="000000"/>
                 </a:solidFill>
               </a:rPr>
-              <a:t xml:space="preserve">    </a:t>
+              <a:t>    </a:t>
             </a:r>
             <a:endParaRPr lang="en-US" sz="1800" dirty="0"/>
           </a:p>
@@ -1921,7 +1921,7 @@
           <p:nvPr/>
         </p:nvPicPr>
         <p:blipFill>
-          <a:blip r:embed="rId100"/>
+          <a:blip r:embed="rId3"/>
           <a:stretch>
             <a:fillRect/>
           </a:stretch>
@@ -1966,7 +1966,7 @@
                   <a:srgbClr val="000000"/>
                 </a:solidFill>
               </a:rPr>
-              <a:t xml:space="preserve">    </a:t>
+              <a:t>    </a:t>
             </a:r>
             <a:endParaRPr lang="en-US" sz="1800" dirty="0"/>
           </a:p>
@@ -1981,7 +1981,7 @@
           <p:nvPr/>
         </p:nvPicPr>
         <p:blipFill>
-          <a:blip r:embed="rId100"/>
+          <a:blip r:embed="rId3"/>
           <a:stretch>
             <a:fillRect/>
           </a:stretch>
@@ -2026,7 +2026,7 @@
                   <a:srgbClr val="000000"/>
                 </a:solidFill>
               </a:rPr>
-              <a:t xml:space="preserve">    </a:t>
+              <a:t>    </a:t>
             </a:r>
             <a:endParaRPr lang="en-US" sz="1800" dirty="0"/>
           </a:p>
@@ -2041,7 +2041,7 @@
           <p:nvPr/>
         </p:nvPicPr>
         <p:blipFill>
-          <a:blip r:embed="rId100"/>
+          <a:blip r:embed="rId3"/>
           <a:stretch>
             <a:fillRect/>
           </a:stretch>
@@ -2086,7 +2086,7 @@
                   <a:srgbClr val="000000"/>
                 </a:solidFill>
               </a:rPr>
-              <a:t xml:space="preserve">    </a:t>
+              <a:t>    </a:t>
             </a:r>
             <a:endParaRPr lang="en-US" sz="1800" dirty="0"/>
           </a:p>
@@ -2101,7 +2101,7 @@
           <p:nvPr/>
         </p:nvPicPr>
         <p:blipFill>
-          <a:blip r:embed="rId100"/>
+          <a:blip r:embed="rId3"/>
           <a:stretch>
             <a:fillRect/>
           </a:stretch>
@@ -2173,7 +2173,7 @@
                   <a:srgbClr val="000000"/>
                 </a:solidFill>
               </a:rPr>
-              <a:t xml:space="preserve">    </a:t>
+              <a:t>    </a:t>
             </a:r>
             <a:endParaRPr lang="en-US" sz="4200" dirty="0"/>
           </a:p>
@@ -2188,7 +2188,7 @@
           <p:nvPr/>
         </p:nvPicPr>
         <p:blipFill>
-          <a:blip r:embed="rId101"/>
+          <a:blip r:embed="rId4"/>
           <a:stretch>
             <a:fillRect/>
           </a:stretch>
@@ -2335,6 +2335,17 @@
               <a:buNone/>
             </a:pPr>
             <a:r>
+              <a:rPr lang="en-US" sz="1500" b="1" dirty="0" err="1">
+                <a:solidFill>
+                  <a:srgbClr val="FFFFFF"/>
+                </a:solidFill>
+                <a:latin typeface="Arial" pitchFamily="34" charset="0"/>
+                <a:ea typeface="Arial" pitchFamily="34" charset="-122"/>
+                <a:cs typeface="Arial" pitchFamily="34" charset="-120"/>
+              </a:rPr>
+              <a:t>Başlangıç</a:t>
+            </a:r>
+            <a:r>
               <a:rPr lang="en-US" sz="1500" b="1" dirty="0">
                 <a:solidFill>
                   <a:srgbClr val="FFFFFF"/>
@@ -2343,7 +2354,18 @@
                 <a:ea typeface="Arial" pitchFamily="34" charset="-122"/>
                 <a:cs typeface="Arial" pitchFamily="34" charset="-120"/>
               </a:rPr>
-              <a:t>Başlangıç Seviyesi • 13-16 Yaş</a:t>
+              <a:t> </a:t>
+            </a:r>
+            <a:r>
+              <a:rPr lang="en-US" sz="1500" b="1" dirty="0" err="1" smtClean="0">
+                <a:solidFill>
+                  <a:srgbClr val="FFFFFF"/>
+                </a:solidFill>
+                <a:latin typeface="Arial" pitchFamily="34" charset="0"/>
+                <a:ea typeface="Arial" pitchFamily="34" charset="-122"/>
+                <a:cs typeface="Arial" pitchFamily="34" charset="-120"/>
+              </a:rPr>
+              <a:t>Seviyesi</a:t>
             </a:r>
             <a:endParaRPr lang="en-US" sz="1500" dirty="0"/>
           </a:p>
@@ -2358,6 +2380,1349 @@
 </file>
 
 <file path=ppt/slides/slide10.xml><?xml version="1.0" encoding="utf-8"?>
+<p:sld xmlns:a="http://schemas.openxmlformats.org/drawingml/2006/main" xmlns:r="http://schemas.openxmlformats.org/officeDocument/2006/relationships" xmlns:p="http://schemas.openxmlformats.org/presentationml/2006/main">
+  <p:cSld name="Slide 10">
+    <p:bg>
+      <p:bgPr>
+        <a:solidFill>
+          <a:srgbClr val="FFF7ED"/>
+        </a:solidFill>
+        <a:effectLst/>
+      </p:bgPr>
+    </p:bg>
+    <p:spTree>
+      <p:nvGrpSpPr>
+        <p:cNvPr id="1" name=""/>
+        <p:cNvGrpSpPr/>
+        <p:nvPr/>
+      </p:nvGrpSpPr>
+      <p:grpSpPr>
+        <a:xfrm>
+          <a:off x="0" y="0"/>
+          <a:ext cx="0" cy="0"/>
+          <a:chOff x="0" y="0"/>
+          <a:chExt cx="0" cy="0"/>
+        </a:xfrm>
+      </p:grpSpPr>
+      <p:sp>
+        <p:nvSpPr>
+          <p:cNvPr id="2" name="Shape 0"/>
+          <p:cNvSpPr/>
+          <p:nvPr/>
+        </p:nvSpPr>
+        <p:spPr>
+          <a:xfrm>
+            <a:off x="0" y="0"/>
+            <a:ext cx="9144000" cy="914400"/>
+          </a:xfrm>
+          <a:prstGeom prst="rect">
+            <a:avLst/>
+          </a:prstGeom>
+          <a:solidFill>
+            <a:srgbClr val="F59E0B"/>
+          </a:solidFill>
+          <a:ln/>
+        </p:spPr>
+      </p:sp>
+      <p:sp>
+        <p:nvSpPr>
+          <p:cNvPr id="3" name="Text 1"/>
+          <p:cNvSpPr/>
+          <p:nvPr/>
+        </p:nvSpPr>
+        <p:spPr>
+          <a:xfrm>
+            <a:off x="274320" y="91440"/>
+            <a:ext cx="8229600" cy="731520"/>
+          </a:xfrm>
+          <a:prstGeom prst="rect">
+            <a:avLst/>
+          </a:prstGeom>
+          <a:noFill/>
+          <a:ln/>
+        </p:spPr>
+        <p:txBody>
+          <a:bodyPr wrap="square" rtlCol="0" anchor="ctr"/>
+          <a:lstStyle/>
+          <a:p>
+            <a:pPr marL="0" indent="0" algn="ctr">
+              <a:buNone/>
+            </a:pPr>
+            <a:r>
+              <a:rPr lang="en-US" sz="2400" b="1" dirty="0">
+                <a:solidFill>
+                  <a:srgbClr val="1A2E5A"/>
+                </a:solidFill>
+                <a:latin typeface="Arial" pitchFamily="34" charset="0"/>
+                <a:ea typeface="Arial" pitchFamily="34" charset="-122"/>
+                <a:cs typeface="Arial" pitchFamily="34" charset="-120"/>
+              </a:rPr>
+              <a:t>      KÜLTÜR KÖŞESİ – DEDEKTİF SIRRI!</a:t>
+            </a:r>
+            <a:endParaRPr lang="en-US" sz="2400" dirty="0"/>
+          </a:p>
+        </p:txBody>
+      </p:sp>
+      <p:pic>
+        <p:nvPicPr>
+          <p:cNvPr id="19" name="Emoji 19" descr="emoji"/>
+          <p:cNvPicPr>
+            <a:picLocks noChangeAspect="1"/>
+          </p:cNvPicPr>
+          <p:nvPr/>
+        </p:nvPicPr>
+        <p:blipFill>
+          <a:blip r:embed="rId3"/>
+          <a:stretch>
+            <a:fillRect/>
+          </a:stretch>
+        </p:blipFill>
+        <p:spPr>
+          <a:xfrm>
+            <a:off x="1487704" y="304800"/>
+            <a:ext cx="304800" cy="304800"/>
+          </a:xfrm>
+          <a:prstGeom prst="rect">
+            <a:avLst/>
+          </a:prstGeom>
+        </p:spPr>
+      </p:pic>
+      <p:sp>
+        <p:nvSpPr>
+          <p:cNvPr id="4" name="Shape 2"/>
+          <p:cNvSpPr/>
+          <p:nvPr/>
+        </p:nvSpPr>
+        <p:spPr>
+          <a:xfrm>
+            <a:off x="731520" y="1097280"/>
+            <a:ext cx="7680960" cy="960120"/>
+          </a:xfrm>
+          <a:prstGeom prst="roundRect">
+            <a:avLst>
+              <a:gd name="adj" fmla="val 14286"/>
+            </a:avLst>
+          </a:prstGeom>
+          <a:solidFill>
+            <a:srgbClr val="FFFFFF"/>
+          </a:solidFill>
+          <a:ln/>
+          <a:effectLst>
+            <a:outerShdw blurRad="101600" dist="38100" dir="2700000" algn="bl" rotWithShape="0">
+              <a:srgbClr val="000000">
+                <a:alpha val="15000"/>
+              </a:srgbClr>
+            </a:outerShdw>
+          </a:effectLst>
+        </p:spPr>
+      </p:sp>
+      <p:sp>
+        <p:nvSpPr>
+          <p:cNvPr id="5" name="Text 3"/>
+          <p:cNvSpPr/>
+          <p:nvPr/>
+        </p:nvSpPr>
+        <p:spPr>
+          <a:xfrm>
+            <a:off x="914400" y="1170432"/>
+            <a:ext cx="7315200" cy="822960"/>
+          </a:xfrm>
+          <a:prstGeom prst="rect">
+            <a:avLst/>
+          </a:prstGeom>
+          <a:noFill/>
+          <a:ln/>
+        </p:spPr>
+        <p:txBody>
+          <a:bodyPr wrap="square" rtlCol="0" anchor="ctr"/>
+          <a:lstStyle/>
+          <a:p>
+            <a:pPr marL="0" indent="0" algn="ctr">
+              <a:buNone/>
+            </a:pPr>
+            <a:r>
+              <a:rPr lang="en-US" sz="1600" b="1" dirty="0">
+                <a:solidFill>
+                  <a:srgbClr val="1E293B"/>
+                </a:solidFill>
+                <a:latin typeface="Arial" pitchFamily="34" charset="0"/>
+                <a:ea typeface="Arial" pitchFamily="34" charset="-122"/>
+                <a:cs typeface="Arial" pitchFamily="34" charset="-120"/>
+              </a:rPr>
+              <a:t>      Türkçede büyüklere isimle seslenmeyiz.</a:t>
+            </a:r>
+            <a:endParaRPr lang="en-US" sz="1600" dirty="0"/>
+          </a:p>
+          <a:p>
+            <a:pPr marL="0" indent="0" algn="ctr">
+              <a:buNone/>
+            </a:pPr>
+            <a:r>
+              <a:rPr lang="en-US" sz="1600" b="1" dirty="0">
+                <a:solidFill>
+                  <a:srgbClr val="1E293B"/>
+                </a:solidFill>
+                <a:latin typeface="Arial" pitchFamily="34" charset="0"/>
+                <a:ea typeface="Arial" pitchFamily="34" charset="-122"/>
+                <a:cs typeface="Arial" pitchFamily="34" charset="-120"/>
+              </a:rPr>
+              <a:t>Onlara 'Ağabey (Abi)', 'Abla', 'Amca' veya 'Teyze' deriz.</a:t>
+            </a:r>
+            <a:endParaRPr lang="en-US" sz="1600" dirty="0"/>
+          </a:p>
+        </p:txBody>
+      </p:sp>
+      <p:pic>
+        <p:nvPicPr>
+          <p:cNvPr id="20" name="Emoji 20" descr="emoji"/>
+          <p:cNvPicPr>
+            <a:picLocks noChangeAspect="1"/>
+          </p:cNvPicPr>
+          <p:nvPr/>
+        </p:nvPicPr>
+        <p:blipFill>
+          <a:blip r:embed="rId4"/>
+          <a:stretch>
+            <a:fillRect/>
+          </a:stretch>
+        </p:blipFill>
+        <p:spPr>
+          <a:xfrm>
+            <a:off x="2482599" y="1361440"/>
+            <a:ext cx="203200" cy="203200"/>
+          </a:xfrm>
+          <a:prstGeom prst="rect">
+            <a:avLst/>
+          </a:prstGeom>
+        </p:spPr>
+      </p:pic>
+      <p:sp>
+        <p:nvSpPr>
+          <p:cNvPr id="6" name="Shape 4"/>
+          <p:cNvSpPr/>
+          <p:nvPr/>
+        </p:nvSpPr>
+        <p:spPr>
+          <a:xfrm>
+            <a:off x="548640" y="2240280"/>
+            <a:ext cx="2468880" cy="1371600"/>
+          </a:xfrm>
+          <a:prstGeom prst="roundRect">
+            <a:avLst>
+              <a:gd name="adj" fmla="val 10000"/>
+            </a:avLst>
+          </a:prstGeom>
+          <a:solidFill>
+            <a:srgbClr val="DBEAFE"/>
+          </a:solidFill>
+          <a:ln/>
+          <a:effectLst>
+            <a:outerShdw blurRad="101600" dist="38100" dir="2700000" algn="bl" rotWithShape="0">
+              <a:srgbClr val="000000">
+                <a:alpha val="15000"/>
+              </a:srgbClr>
+            </a:outerShdw>
+          </a:effectLst>
+        </p:spPr>
+      </p:sp>
+      <p:sp>
+        <p:nvSpPr>
+          <p:cNvPr id="7" name="Text 5"/>
+          <p:cNvSpPr/>
+          <p:nvPr/>
+        </p:nvSpPr>
+        <p:spPr>
+          <a:xfrm>
+            <a:off x="548640" y="2286000"/>
+            <a:ext cx="2468880" cy="777240"/>
+          </a:xfrm>
+          <a:prstGeom prst="rect">
+            <a:avLst/>
+          </a:prstGeom>
+          <a:noFill/>
+          <a:ln/>
+        </p:spPr>
+        <p:txBody>
+          <a:bodyPr wrap="square" rtlCol="0" anchor="ctr"/>
+          <a:lstStyle/>
+          <a:p>
+            <a:pPr marL="0" indent="0" algn="ctr">
+              <a:buNone/>
+            </a:pPr>
+            <a:r>
+              <a:rPr lang="en-US" sz="3200" dirty="0">
+                <a:solidFill>
+                  <a:srgbClr val="000000"/>
+                </a:solidFill>
+              </a:rPr>
+              <a:t>    </a:t>
+            </a:r>
+            <a:endParaRPr lang="en-US" sz="3200" dirty="0"/>
+          </a:p>
+        </p:txBody>
+      </p:sp>
+      <p:pic>
+        <p:nvPicPr>
+          <p:cNvPr id="21" name="Emoji 21" descr="emoji"/>
+          <p:cNvPicPr>
+            <a:picLocks noChangeAspect="1"/>
+          </p:cNvPicPr>
+          <p:nvPr/>
+        </p:nvPicPr>
+        <p:blipFill>
+          <a:blip r:embed="rId5"/>
+          <a:stretch>
+            <a:fillRect/>
+          </a:stretch>
+        </p:blipFill>
+        <p:spPr>
+          <a:xfrm>
+            <a:off x="1579880" y="2471420"/>
+            <a:ext cx="406400" cy="406400"/>
+          </a:xfrm>
+          <a:prstGeom prst="rect">
+            <a:avLst/>
+          </a:prstGeom>
+        </p:spPr>
+      </p:pic>
+      <p:sp>
+        <p:nvSpPr>
+          <p:cNvPr id="8" name="Text 6"/>
+          <p:cNvSpPr/>
+          <p:nvPr/>
+        </p:nvSpPr>
+        <p:spPr>
+          <a:xfrm>
+            <a:off x="640080" y="3017520"/>
+            <a:ext cx="2286000" cy="502920"/>
+          </a:xfrm>
+          <a:prstGeom prst="rect">
+            <a:avLst/>
+          </a:prstGeom>
+          <a:noFill/>
+          <a:ln/>
+        </p:spPr>
+        <p:txBody>
+          <a:bodyPr wrap="square" rtlCol="0" anchor="ctr"/>
+          <a:lstStyle/>
+          <a:p>
+            <a:pPr marL="0" indent="0" algn="ctr">
+              <a:buNone/>
+            </a:pPr>
+            <a:r>
+              <a:rPr lang="en-US" sz="1400" b="1" dirty="0">
+                <a:solidFill>
+                  <a:srgbClr val="1A2E5A"/>
+                </a:solidFill>
+                <a:latin typeface="Arial" pitchFamily="34" charset="0"/>
+                <a:ea typeface="Arial" pitchFamily="34" charset="-122"/>
+                <a:cs typeface="Arial" pitchFamily="34" charset="-120"/>
+              </a:rPr>
+              <a:t>Ayşe — 7 yaş</a:t>
+            </a:r>
+            <a:endParaRPr lang="en-US" sz="1400" dirty="0"/>
+          </a:p>
+        </p:txBody>
+      </p:sp>
+      <p:sp>
+        <p:nvSpPr>
+          <p:cNvPr id="9" name="Shape 7"/>
+          <p:cNvSpPr/>
+          <p:nvPr/>
+        </p:nvSpPr>
+        <p:spPr>
+          <a:xfrm>
+            <a:off x="3246120" y="2240280"/>
+            <a:ext cx="2468880" cy="1371600"/>
+          </a:xfrm>
+          <a:prstGeom prst="roundRect">
+            <a:avLst>
+              <a:gd name="adj" fmla="val 10000"/>
+            </a:avLst>
+          </a:prstGeom>
+          <a:solidFill>
+            <a:srgbClr val="DBEAFE"/>
+          </a:solidFill>
+          <a:ln/>
+          <a:effectLst>
+            <a:outerShdw blurRad="101600" dist="38100" dir="2700000" algn="bl" rotWithShape="0">
+              <a:srgbClr val="000000">
+                <a:alpha val="15000"/>
+              </a:srgbClr>
+            </a:outerShdw>
+          </a:effectLst>
+        </p:spPr>
+      </p:sp>
+      <p:sp>
+        <p:nvSpPr>
+          <p:cNvPr id="10" name="Text 8"/>
+          <p:cNvSpPr/>
+          <p:nvPr/>
+        </p:nvSpPr>
+        <p:spPr>
+          <a:xfrm>
+            <a:off x="3246120" y="2286000"/>
+            <a:ext cx="2468880" cy="777240"/>
+          </a:xfrm>
+          <a:prstGeom prst="rect">
+            <a:avLst/>
+          </a:prstGeom>
+          <a:noFill/>
+          <a:ln/>
+        </p:spPr>
+        <p:txBody>
+          <a:bodyPr wrap="square" rtlCol="0" anchor="ctr"/>
+          <a:lstStyle/>
+          <a:p>
+            <a:pPr marL="0" indent="0" algn="ctr">
+              <a:buNone/>
+            </a:pPr>
+            <a:r>
+              <a:rPr lang="en-US" sz="3200" dirty="0">
+                <a:solidFill>
+                  <a:srgbClr val="000000"/>
+                </a:solidFill>
+              </a:rPr>
+              <a:t>    </a:t>
+            </a:r>
+            <a:endParaRPr lang="en-US" sz="3200" dirty="0"/>
+          </a:p>
+        </p:txBody>
+      </p:sp>
+      <p:pic>
+        <p:nvPicPr>
+          <p:cNvPr id="22" name="Emoji 22" descr="emoji"/>
+          <p:cNvPicPr>
+            <a:picLocks noChangeAspect="1"/>
+          </p:cNvPicPr>
+          <p:nvPr/>
+        </p:nvPicPr>
+        <p:blipFill>
+          <a:blip r:embed="rId6"/>
+          <a:stretch>
+            <a:fillRect/>
+          </a:stretch>
+        </p:blipFill>
+        <p:spPr>
+          <a:xfrm>
+            <a:off x="4277360" y="2471420"/>
+            <a:ext cx="406400" cy="406400"/>
+          </a:xfrm>
+          <a:prstGeom prst="rect">
+            <a:avLst/>
+          </a:prstGeom>
+        </p:spPr>
+      </p:pic>
+      <p:sp>
+        <p:nvSpPr>
+          <p:cNvPr id="11" name="Text 9"/>
+          <p:cNvSpPr/>
+          <p:nvPr/>
+        </p:nvSpPr>
+        <p:spPr>
+          <a:xfrm>
+            <a:off x="3337560" y="3017520"/>
+            <a:ext cx="2286000" cy="502920"/>
+          </a:xfrm>
+          <a:prstGeom prst="rect">
+            <a:avLst/>
+          </a:prstGeom>
+          <a:noFill/>
+          <a:ln/>
+        </p:spPr>
+        <p:txBody>
+          <a:bodyPr wrap="square" rtlCol="0" anchor="ctr"/>
+          <a:lstStyle/>
+          <a:p>
+            <a:pPr marL="0" indent="0" algn="ctr">
+              <a:buNone/>
+            </a:pPr>
+            <a:r>
+              <a:rPr lang="en-US" sz="1400" b="1" dirty="0">
+                <a:solidFill>
+                  <a:srgbClr val="1A2E5A"/>
+                </a:solidFill>
+                <a:latin typeface="Arial" pitchFamily="34" charset="0"/>
+                <a:ea typeface="Arial" pitchFamily="34" charset="-122"/>
+                <a:cs typeface="Arial" pitchFamily="34" charset="-120"/>
+              </a:rPr>
+              <a:t>Fatma — 17 yaş</a:t>
+            </a:r>
+            <a:endParaRPr lang="en-US" sz="1400" dirty="0"/>
+          </a:p>
+        </p:txBody>
+      </p:sp>
+      <p:sp>
+        <p:nvSpPr>
+          <p:cNvPr id="12" name="Shape 10"/>
+          <p:cNvSpPr/>
+          <p:nvPr/>
+        </p:nvSpPr>
+        <p:spPr>
+          <a:xfrm>
+            <a:off x="5943600" y="2240280"/>
+            <a:ext cx="2468880" cy="1371600"/>
+          </a:xfrm>
+          <a:prstGeom prst="roundRect">
+            <a:avLst>
+              <a:gd name="adj" fmla="val 10000"/>
+            </a:avLst>
+          </a:prstGeom>
+          <a:solidFill>
+            <a:srgbClr val="DBEAFE"/>
+          </a:solidFill>
+          <a:ln/>
+          <a:effectLst>
+            <a:outerShdw blurRad="101600" dist="38100" dir="2700000" algn="bl" rotWithShape="0">
+              <a:srgbClr val="000000">
+                <a:alpha val="15000"/>
+              </a:srgbClr>
+            </a:outerShdw>
+          </a:effectLst>
+        </p:spPr>
+      </p:sp>
+      <p:sp>
+        <p:nvSpPr>
+          <p:cNvPr id="13" name="Text 11"/>
+          <p:cNvSpPr/>
+          <p:nvPr/>
+        </p:nvSpPr>
+        <p:spPr>
+          <a:xfrm>
+            <a:off x="5943600" y="2286000"/>
+            <a:ext cx="2468880" cy="777240"/>
+          </a:xfrm>
+          <a:prstGeom prst="rect">
+            <a:avLst/>
+          </a:prstGeom>
+          <a:noFill/>
+          <a:ln/>
+        </p:spPr>
+        <p:txBody>
+          <a:bodyPr wrap="square" rtlCol="0" anchor="ctr"/>
+          <a:lstStyle/>
+          <a:p>
+            <a:pPr marL="0" indent="0" algn="ctr">
+              <a:buNone/>
+            </a:pPr>
+            <a:r>
+              <a:rPr lang="en-US" sz="3200" dirty="0">
+                <a:solidFill>
+                  <a:srgbClr val="000000"/>
+                </a:solidFill>
+              </a:rPr>
+              <a:t>    </a:t>
+            </a:r>
+            <a:endParaRPr lang="en-US" sz="3200" dirty="0"/>
+          </a:p>
+        </p:txBody>
+      </p:sp>
+      <p:pic>
+        <p:nvPicPr>
+          <p:cNvPr id="23" name="Emoji 23" descr="emoji"/>
+          <p:cNvPicPr>
+            <a:picLocks noChangeAspect="1"/>
+          </p:cNvPicPr>
+          <p:nvPr/>
+        </p:nvPicPr>
+        <p:blipFill>
+          <a:blip r:embed="rId7"/>
+          <a:stretch>
+            <a:fillRect/>
+          </a:stretch>
+        </p:blipFill>
+        <p:spPr>
+          <a:xfrm>
+            <a:off x="6974840" y="2471420"/>
+            <a:ext cx="406400" cy="406400"/>
+          </a:xfrm>
+          <a:prstGeom prst="rect">
+            <a:avLst/>
+          </a:prstGeom>
+        </p:spPr>
+      </p:pic>
+      <p:sp>
+        <p:nvSpPr>
+          <p:cNvPr id="14" name="Text 12"/>
+          <p:cNvSpPr/>
+          <p:nvPr/>
+        </p:nvSpPr>
+        <p:spPr>
+          <a:xfrm>
+            <a:off x="6035040" y="3017520"/>
+            <a:ext cx="2286000" cy="502920"/>
+          </a:xfrm>
+          <a:prstGeom prst="rect">
+            <a:avLst/>
+          </a:prstGeom>
+          <a:noFill/>
+          <a:ln/>
+        </p:spPr>
+        <p:txBody>
+          <a:bodyPr wrap="square" rtlCol="0" anchor="ctr"/>
+          <a:lstStyle/>
+          <a:p>
+            <a:pPr marL="0" indent="0" algn="ctr">
+              <a:buNone/>
+            </a:pPr>
+            <a:r>
+              <a:rPr lang="en-US" sz="1400" b="1" dirty="0">
+                <a:solidFill>
+                  <a:srgbClr val="1A2E5A"/>
+                </a:solidFill>
+                <a:latin typeface="Arial" pitchFamily="34" charset="0"/>
+                <a:ea typeface="Arial" pitchFamily="34" charset="-122"/>
+                <a:cs typeface="Arial" pitchFamily="34" charset="-120"/>
+              </a:rPr>
+              <a:t>Hüseyin — 17 yaş</a:t>
+            </a:r>
+            <a:endParaRPr lang="en-US" sz="1400" dirty="0"/>
+          </a:p>
+        </p:txBody>
+      </p:sp>
+      <p:sp>
+        <p:nvSpPr>
+          <p:cNvPr id="15" name="Shape 13"/>
+          <p:cNvSpPr/>
+          <p:nvPr/>
+        </p:nvSpPr>
+        <p:spPr>
+          <a:xfrm>
+            <a:off x="731520" y="3657600"/>
+            <a:ext cx="7680960" cy="914400"/>
+          </a:xfrm>
+          <a:prstGeom prst="roundRect">
+            <a:avLst>
+              <a:gd name="adj" fmla="val 15000"/>
+            </a:avLst>
+          </a:prstGeom>
+          <a:solidFill>
+            <a:srgbClr val="16A34A"/>
+          </a:solidFill>
+          <a:ln/>
+          <a:effectLst>
+            <a:outerShdw blurRad="101600" dist="38100" dir="2700000" algn="bl" rotWithShape="0">
+              <a:srgbClr val="000000">
+                <a:alpha val="15000"/>
+              </a:srgbClr>
+            </a:outerShdw>
+          </a:effectLst>
+        </p:spPr>
+      </p:sp>
+      <p:sp>
+        <p:nvSpPr>
+          <p:cNvPr id="16" name="Text 14"/>
+          <p:cNvSpPr/>
+          <p:nvPr/>
+        </p:nvSpPr>
+        <p:spPr>
+          <a:xfrm>
+            <a:off x="914400" y="3703320"/>
+            <a:ext cx="7315200" cy="822960"/>
+          </a:xfrm>
+          <a:prstGeom prst="rect">
+            <a:avLst/>
+          </a:prstGeom>
+          <a:noFill/>
+          <a:ln/>
+        </p:spPr>
+        <p:txBody>
+          <a:bodyPr wrap="square" rtlCol="0" anchor="ctr"/>
+          <a:lstStyle/>
+          <a:p>
+            <a:pPr marL="0" indent="0" algn="ctr">
+              <a:buNone/>
+            </a:pPr>
+            <a:r>
+              <a:rPr lang="en-US" sz="1400" b="1" dirty="0">
+                <a:solidFill>
+                  <a:srgbClr val="FFFFFF"/>
+                </a:solidFill>
+                <a:latin typeface="Arial" pitchFamily="34" charset="0"/>
+                <a:ea typeface="Arial" pitchFamily="34" charset="-122"/>
+                <a:cs typeface="Arial" pitchFamily="34" charset="-120"/>
+              </a:rPr>
+              <a:t>Ayşe, </a:t>
+            </a:r>
+            <a:r>
+              <a:rPr lang="en-US" sz="1400" b="1" dirty="0" err="1">
+                <a:solidFill>
+                  <a:srgbClr val="FFFFFF"/>
+                </a:solidFill>
+                <a:latin typeface="Arial" pitchFamily="34" charset="0"/>
+                <a:ea typeface="Arial" pitchFamily="34" charset="-122"/>
+                <a:cs typeface="Arial" pitchFamily="34" charset="-120"/>
+              </a:rPr>
+              <a:t>Fatma'ya</a:t>
+            </a:r>
+            <a:r>
+              <a:rPr lang="en-US" sz="1400" b="1" dirty="0">
+                <a:solidFill>
+                  <a:srgbClr val="FFFFFF"/>
+                </a:solidFill>
+                <a:latin typeface="Arial" pitchFamily="34" charset="0"/>
+                <a:ea typeface="Arial" pitchFamily="34" charset="-122"/>
+                <a:cs typeface="Arial" pitchFamily="34" charset="-120"/>
+              </a:rPr>
+              <a:t>: 'Fatma Abla!'  •  Hüseyin'e: 'Hüseyin Abi!'</a:t>
+            </a:r>
+            <a:endParaRPr lang="en-US" sz="1400" dirty="0"/>
+          </a:p>
+          <a:p>
+            <a:pPr marL="0" indent="0" algn="ctr">
+              <a:buNone/>
+            </a:pPr>
+            <a:r>
+              <a:rPr lang="en-US" sz="1400" b="1" dirty="0">
+                <a:solidFill>
+                  <a:srgbClr val="FFFFFF"/>
+                </a:solidFill>
+                <a:latin typeface="Arial" pitchFamily="34" charset="0"/>
+                <a:ea typeface="Arial" pitchFamily="34" charset="-122"/>
+                <a:cs typeface="Arial" pitchFamily="34" charset="-120"/>
+              </a:rPr>
+              <a:t>Fatma ile Hüseyin akran. Fatma, Hüseyin'e sadece 'Hüseyin!' der.</a:t>
+            </a:r>
+            <a:endParaRPr lang="en-US" sz="1400" dirty="0"/>
+          </a:p>
+        </p:txBody>
+      </p:sp>
+      <p:sp>
+        <p:nvSpPr>
+          <p:cNvPr id="17" name="Shape 15"/>
+          <p:cNvSpPr/>
+          <p:nvPr/>
+        </p:nvSpPr>
+        <p:spPr>
+          <a:xfrm>
+            <a:off x="3017520" y="4616963"/>
+            <a:ext cx="3108960" cy="502920"/>
+          </a:xfrm>
+          <a:prstGeom prst="roundRect">
+            <a:avLst>
+              <a:gd name="adj" fmla="val 49091"/>
+            </a:avLst>
+          </a:prstGeom>
+          <a:solidFill>
+            <a:srgbClr val="DC2626"/>
+          </a:solidFill>
+          <a:ln/>
+          <a:effectLst>
+            <a:outerShdw blurRad="101600" dist="38100" dir="2700000" algn="bl" rotWithShape="0">
+              <a:srgbClr val="000000">
+                <a:alpha val="15000"/>
+              </a:srgbClr>
+            </a:outerShdw>
+          </a:effectLst>
+        </p:spPr>
+        <p:txBody>
+          <a:bodyPr/>
+          <a:lstStyle/>
+          <a:p>
+            <a:endParaRPr lang="tr-TR" dirty="0"/>
+          </a:p>
+        </p:txBody>
+      </p:sp>
+      <p:sp>
+        <p:nvSpPr>
+          <p:cNvPr id="18" name="Text 16"/>
+          <p:cNvSpPr/>
+          <p:nvPr/>
+        </p:nvSpPr>
+        <p:spPr>
+          <a:xfrm>
+            <a:off x="2926080" y="4623624"/>
+            <a:ext cx="3108960" cy="502920"/>
+          </a:xfrm>
+          <a:prstGeom prst="rect">
+            <a:avLst/>
+          </a:prstGeom>
+          <a:noFill/>
+          <a:ln/>
+        </p:spPr>
+        <p:txBody>
+          <a:bodyPr wrap="square" rtlCol="0" anchor="ctr"/>
+          <a:lstStyle/>
+          <a:p>
+            <a:pPr marL="0" indent="0" algn="ctr">
+              <a:buNone/>
+            </a:pPr>
+            <a:r>
+              <a:rPr lang="en-US" sz="1400" b="1" dirty="0">
+                <a:solidFill>
+                  <a:srgbClr val="FFFFFF"/>
+                </a:solidFill>
+                <a:latin typeface="Arial" pitchFamily="34" charset="0"/>
+                <a:ea typeface="Arial" pitchFamily="34" charset="-122"/>
+                <a:cs typeface="Arial" pitchFamily="34" charset="-120"/>
+              </a:rPr>
+              <a:t>      Düşün!</a:t>
+            </a:r>
+            <a:endParaRPr lang="en-US" sz="1400" dirty="0"/>
+          </a:p>
+        </p:txBody>
+      </p:sp>
+      <p:pic>
+        <p:nvPicPr>
+          <p:cNvPr id="24" name="Emoji 24" descr="emoji"/>
+          <p:cNvPicPr>
+            <a:picLocks noChangeAspect="1"/>
+          </p:cNvPicPr>
+          <p:nvPr/>
+        </p:nvPicPr>
+        <p:blipFill>
+          <a:blip r:embed="rId8"/>
+          <a:stretch>
+            <a:fillRect/>
+          </a:stretch>
+        </p:blipFill>
+        <p:spPr>
+          <a:xfrm>
+            <a:off x="4036101" y="4786184"/>
+            <a:ext cx="177800" cy="177800"/>
+          </a:xfrm>
+          <a:prstGeom prst="rect">
+            <a:avLst/>
+          </a:prstGeom>
+        </p:spPr>
+      </p:pic>
+    </p:spTree>
+  </p:cSld>
+  <p:clrMapOvr>
+    <a:masterClrMapping/>
+  </p:clrMapOvr>
+  <p:timing>
+    <p:tnLst>
+      <p:par>
+        <p:cTn id="1" dur="indefinite" restart="never" nodeType="tmRoot">
+          <p:childTnLst>
+            <p:seq concurrent="1" nextAc="seek">
+              <p:cTn id="2" dur="indefinite" nodeType="mainSeq">
+                <p:childTnLst>
+                  <p:par>
+                    <p:cTn id="3" fill="hold">
+                      <p:stCondLst>
+                        <p:cond delay="indefinite"/>
+                      </p:stCondLst>
+                      <p:childTnLst>
+                        <p:par>
+                          <p:cTn id="4" fill="hold">
+                            <p:stCondLst>
+                              <p:cond delay="0"/>
+                            </p:stCondLst>
+                            <p:childTnLst>
+                              <p:par>
+                                <p:cTn id="5" presetID="1" presetClass="entr" presetSubtype="0" fill="hold" grpId="0" nodeType="clickEffect">
+                                  <p:stCondLst>
+                                    <p:cond delay="0"/>
+                                  </p:stCondLst>
+                                  <p:childTnLst>
+                                    <p:set>
+                                      <p:cBhvr>
+                                        <p:cTn id="6" dur="1" fill="hold">
+                                          <p:stCondLst>
+                                            <p:cond delay="0"/>
+                                          </p:stCondLst>
+                                        </p:cTn>
+                                        <p:tgtEl>
+                                          <p:spTgt spid="5"/>
+                                        </p:tgtEl>
+                                        <p:attrNameLst>
+                                          <p:attrName>style.visibility</p:attrName>
+                                        </p:attrNameLst>
+                                      </p:cBhvr>
+                                      <p:to>
+                                        <p:strVal val="visible"/>
+                                      </p:to>
+                                    </p:set>
+                                  </p:childTnLst>
+                                </p:cTn>
+                              </p:par>
+                            </p:childTnLst>
+                          </p:cTn>
+                        </p:par>
+                      </p:childTnLst>
+                    </p:cTn>
+                  </p:par>
+                  <p:par>
+                    <p:cTn id="7" fill="hold">
+                      <p:stCondLst>
+                        <p:cond delay="indefinite"/>
+                      </p:stCondLst>
+                      <p:childTnLst>
+                        <p:par>
+                          <p:cTn id="8" fill="hold">
+                            <p:stCondLst>
+                              <p:cond delay="0"/>
+                            </p:stCondLst>
+                            <p:childTnLst>
+                              <p:par>
+                                <p:cTn id="9" presetID="1" presetClass="entr" presetSubtype="0" fill="hold" nodeType="clickEffect">
+                                  <p:stCondLst>
+                                    <p:cond delay="0"/>
+                                  </p:stCondLst>
+                                  <p:childTnLst>
+                                    <p:set>
+                                      <p:cBhvr>
+                                        <p:cTn id="10" dur="1" fill="hold">
+                                          <p:stCondLst>
+                                            <p:cond delay="0"/>
+                                          </p:stCondLst>
+                                        </p:cTn>
+                                        <p:tgtEl>
+                                          <p:spTgt spid="6"/>
+                                        </p:tgtEl>
+                                        <p:attrNameLst>
+                                          <p:attrName>style.visibility</p:attrName>
+                                        </p:attrNameLst>
+                                      </p:cBhvr>
+                                      <p:to>
+                                        <p:strVal val="visible"/>
+                                      </p:to>
+                                    </p:set>
+                                  </p:childTnLst>
+                                </p:cTn>
+                              </p:par>
+                              <p:par>
+                                <p:cTn id="11" presetID="1" presetClass="entr" presetSubtype="0" fill="hold" grpId="0" nodeType="withEffect">
+                                  <p:stCondLst>
+                                    <p:cond delay="0"/>
+                                  </p:stCondLst>
+                                  <p:childTnLst>
+                                    <p:set>
+                                      <p:cBhvr>
+                                        <p:cTn id="12" dur="1" fill="hold">
+                                          <p:stCondLst>
+                                            <p:cond delay="0"/>
+                                          </p:stCondLst>
+                                        </p:cTn>
+                                        <p:tgtEl>
+                                          <p:spTgt spid="7"/>
+                                        </p:tgtEl>
+                                        <p:attrNameLst>
+                                          <p:attrName>style.visibility</p:attrName>
+                                        </p:attrNameLst>
+                                      </p:cBhvr>
+                                      <p:to>
+                                        <p:strVal val="visible"/>
+                                      </p:to>
+                                    </p:set>
+                                  </p:childTnLst>
+                                </p:cTn>
+                              </p:par>
+                              <p:par>
+                                <p:cTn id="13" presetID="1" presetClass="entr" presetSubtype="0" fill="hold" grpId="0" nodeType="withEffect">
+                                  <p:stCondLst>
+                                    <p:cond delay="0"/>
+                                  </p:stCondLst>
+                                  <p:childTnLst>
+                                    <p:set>
+                                      <p:cBhvr>
+                                        <p:cTn id="14" dur="1" fill="hold">
+                                          <p:stCondLst>
+                                            <p:cond delay="0"/>
+                                          </p:stCondLst>
+                                        </p:cTn>
+                                        <p:tgtEl>
+                                          <p:spTgt spid="8"/>
+                                        </p:tgtEl>
+                                        <p:attrNameLst>
+                                          <p:attrName>style.visibility</p:attrName>
+                                        </p:attrNameLst>
+                                      </p:cBhvr>
+                                      <p:to>
+                                        <p:strVal val="visible"/>
+                                      </p:to>
+                                    </p:set>
+                                  </p:childTnLst>
+                                </p:cTn>
+                              </p:par>
+                            </p:childTnLst>
+                          </p:cTn>
+                        </p:par>
+                      </p:childTnLst>
+                    </p:cTn>
+                  </p:par>
+                  <p:par>
+                    <p:cTn id="15" fill="hold">
+                      <p:stCondLst>
+                        <p:cond delay="indefinite"/>
+                      </p:stCondLst>
+                      <p:childTnLst>
+                        <p:par>
+                          <p:cTn id="16" fill="hold">
+                            <p:stCondLst>
+                              <p:cond delay="0"/>
+                            </p:stCondLst>
+                            <p:childTnLst>
+                              <p:par>
+                                <p:cTn id="17" presetID="1" presetClass="entr" presetSubtype="0" fill="hold" nodeType="clickEffect">
+                                  <p:stCondLst>
+                                    <p:cond delay="0"/>
+                                  </p:stCondLst>
+                                  <p:childTnLst>
+                                    <p:set>
+                                      <p:cBhvr>
+                                        <p:cTn id="18" dur="1" fill="hold">
+                                          <p:stCondLst>
+                                            <p:cond delay="0"/>
+                                          </p:stCondLst>
+                                        </p:cTn>
+                                        <p:tgtEl>
+                                          <p:spTgt spid="9"/>
+                                        </p:tgtEl>
+                                        <p:attrNameLst>
+                                          <p:attrName>style.visibility</p:attrName>
+                                        </p:attrNameLst>
+                                      </p:cBhvr>
+                                      <p:to>
+                                        <p:strVal val="visible"/>
+                                      </p:to>
+                                    </p:set>
+                                  </p:childTnLst>
+                                </p:cTn>
+                              </p:par>
+                              <p:par>
+                                <p:cTn id="19" presetID="1" presetClass="entr" presetSubtype="0" fill="hold" grpId="0" nodeType="withEffect">
+                                  <p:stCondLst>
+                                    <p:cond delay="0"/>
+                                  </p:stCondLst>
+                                  <p:childTnLst>
+                                    <p:set>
+                                      <p:cBhvr>
+                                        <p:cTn id="20" dur="1" fill="hold">
+                                          <p:stCondLst>
+                                            <p:cond delay="0"/>
+                                          </p:stCondLst>
+                                        </p:cTn>
+                                        <p:tgtEl>
+                                          <p:spTgt spid="10"/>
+                                        </p:tgtEl>
+                                        <p:attrNameLst>
+                                          <p:attrName>style.visibility</p:attrName>
+                                        </p:attrNameLst>
+                                      </p:cBhvr>
+                                      <p:to>
+                                        <p:strVal val="visible"/>
+                                      </p:to>
+                                    </p:set>
+                                  </p:childTnLst>
+                                </p:cTn>
+                              </p:par>
+                              <p:par>
+                                <p:cTn id="21" presetID="1" presetClass="entr" presetSubtype="0" fill="hold" grpId="0" nodeType="withEffect">
+                                  <p:stCondLst>
+                                    <p:cond delay="0"/>
+                                  </p:stCondLst>
+                                  <p:childTnLst>
+                                    <p:set>
+                                      <p:cBhvr>
+                                        <p:cTn id="22" dur="1" fill="hold">
+                                          <p:stCondLst>
+                                            <p:cond delay="0"/>
+                                          </p:stCondLst>
+                                        </p:cTn>
+                                        <p:tgtEl>
+                                          <p:spTgt spid="11"/>
+                                        </p:tgtEl>
+                                        <p:attrNameLst>
+                                          <p:attrName>style.visibility</p:attrName>
+                                        </p:attrNameLst>
+                                      </p:cBhvr>
+                                      <p:to>
+                                        <p:strVal val="visible"/>
+                                      </p:to>
+                                    </p:set>
+                                  </p:childTnLst>
+                                </p:cTn>
+                              </p:par>
+                            </p:childTnLst>
+                          </p:cTn>
+                        </p:par>
+                      </p:childTnLst>
+                    </p:cTn>
+                  </p:par>
+                  <p:par>
+                    <p:cTn id="23" fill="hold">
+                      <p:stCondLst>
+                        <p:cond delay="indefinite"/>
+                      </p:stCondLst>
+                      <p:childTnLst>
+                        <p:par>
+                          <p:cTn id="24" fill="hold">
+                            <p:stCondLst>
+                              <p:cond delay="0"/>
+                            </p:stCondLst>
+                            <p:childTnLst>
+                              <p:par>
+                                <p:cTn id="25" presetID="1" presetClass="entr" presetSubtype="0" fill="hold" nodeType="clickEffect">
+                                  <p:stCondLst>
+                                    <p:cond delay="0"/>
+                                  </p:stCondLst>
+                                  <p:childTnLst>
+                                    <p:set>
+                                      <p:cBhvr>
+                                        <p:cTn id="26" dur="1" fill="hold">
+                                          <p:stCondLst>
+                                            <p:cond delay="0"/>
+                                          </p:stCondLst>
+                                        </p:cTn>
+                                        <p:tgtEl>
+                                          <p:spTgt spid="12"/>
+                                        </p:tgtEl>
+                                        <p:attrNameLst>
+                                          <p:attrName>style.visibility</p:attrName>
+                                        </p:attrNameLst>
+                                      </p:cBhvr>
+                                      <p:to>
+                                        <p:strVal val="visible"/>
+                                      </p:to>
+                                    </p:set>
+                                  </p:childTnLst>
+                                </p:cTn>
+                              </p:par>
+                              <p:par>
+                                <p:cTn id="27" presetID="1" presetClass="entr" presetSubtype="0" fill="hold" grpId="0" nodeType="withEffect">
+                                  <p:stCondLst>
+                                    <p:cond delay="0"/>
+                                  </p:stCondLst>
+                                  <p:childTnLst>
+                                    <p:set>
+                                      <p:cBhvr>
+                                        <p:cTn id="28" dur="1" fill="hold">
+                                          <p:stCondLst>
+                                            <p:cond delay="0"/>
+                                          </p:stCondLst>
+                                        </p:cTn>
+                                        <p:tgtEl>
+                                          <p:spTgt spid="13"/>
+                                        </p:tgtEl>
+                                        <p:attrNameLst>
+                                          <p:attrName>style.visibility</p:attrName>
+                                        </p:attrNameLst>
+                                      </p:cBhvr>
+                                      <p:to>
+                                        <p:strVal val="visible"/>
+                                      </p:to>
+                                    </p:set>
+                                  </p:childTnLst>
+                                </p:cTn>
+                              </p:par>
+                              <p:par>
+                                <p:cTn id="29" presetID="1" presetClass="entr" presetSubtype="0" fill="hold" grpId="0" nodeType="withEffect">
+                                  <p:stCondLst>
+                                    <p:cond delay="0"/>
+                                  </p:stCondLst>
+                                  <p:childTnLst>
+                                    <p:set>
+                                      <p:cBhvr>
+                                        <p:cTn id="30" dur="1" fill="hold">
+                                          <p:stCondLst>
+                                            <p:cond delay="0"/>
+                                          </p:stCondLst>
+                                        </p:cTn>
+                                        <p:tgtEl>
+                                          <p:spTgt spid="14"/>
+                                        </p:tgtEl>
+                                        <p:attrNameLst>
+                                          <p:attrName>style.visibility</p:attrName>
+                                        </p:attrNameLst>
+                                      </p:cBhvr>
+                                      <p:to>
+                                        <p:strVal val="visible"/>
+                                      </p:to>
+                                    </p:set>
+                                  </p:childTnLst>
+                                </p:cTn>
+                              </p:par>
+                            </p:childTnLst>
+                          </p:cTn>
+                        </p:par>
+                      </p:childTnLst>
+                    </p:cTn>
+                  </p:par>
+                  <p:par>
+                    <p:cTn id="31" fill="hold">
+                      <p:stCondLst>
+                        <p:cond delay="indefinite"/>
+                      </p:stCondLst>
+                      <p:childTnLst>
+                        <p:par>
+                          <p:cTn id="32" fill="hold">
+                            <p:stCondLst>
+                              <p:cond delay="0"/>
+                            </p:stCondLst>
+                            <p:childTnLst>
+                              <p:par>
+                                <p:cTn id="33" presetID="1" presetClass="entr" presetSubtype="0" fill="hold" nodeType="clickEffect">
+                                  <p:stCondLst>
+                                    <p:cond delay="0"/>
+                                  </p:stCondLst>
+                                  <p:childTnLst>
+                                    <p:set>
+                                      <p:cBhvr>
+                                        <p:cTn id="34" dur="1" fill="hold">
+                                          <p:stCondLst>
+                                            <p:cond delay="0"/>
+                                          </p:stCondLst>
+                                        </p:cTn>
+                                        <p:tgtEl>
+                                          <p:spTgt spid="15"/>
+                                        </p:tgtEl>
+                                        <p:attrNameLst>
+                                          <p:attrName>style.visibility</p:attrName>
+                                        </p:attrNameLst>
+                                      </p:cBhvr>
+                                      <p:to>
+                                        <p:strVal val="visible"/>
+                                      </p:to>
+                                    </p:set>
+                                  </p:childTnLst>
+                                </p:cTn>
+                              </p:par>
+                              <p:par>
+                                <p:cTn id="35" presetID="1" presetClass="entr" presetSubtype="0" fill="hold" grpId="0" nodeType="withEffect">
+                                  <p:stCondLst>
+                                    <p:cond delay="0"/>
+                                  </p:stCondLst>
+                                  <p:childTnLst>
+                                    <p:set>
+                                      <p:cBhvr>
+                                        <p:cTn id="36" dur="1" fill="hold">
+                                          <p:stCondLst>
+                                            <p:cond delay="0"/>
+                                          </p:stCondLst>
+                                        </p:cTn>
+                                        <p:tgtEl>
+                                          <p:spTgt spid="16"/>
+                                        </p:tgtEl>
+                                        <p:attrNameLst>
+                                          <p:attrName>style.visibility</p:attrName>
+                                        </p:attrNameLst>
+                                      </p:cBhvr>
+                                      <p:to>
+                                        <p:strVal val="visible"/>
+                                      </p:to>
+                                    </p:set>
+                                  </p:childTnLst>
+                                </p:cTn>
+                              </p:par>
+                            </p:childTnLst>
+                          </p:cTn>
+                        </p:par>
+                      </p:childTnLst>
+                    </p:cTn>
+                  </p:par>
+                  <p:par>
+                    <p:cTn id="37" fill="hold">
+                      <p:stCondLst>
+                        <p:cond delay="indefinite"/>
+                      </p:stCondLst>
+                      <p:childTnLst>
+                        <p:par>
+                          <p:cTn id="38" fill="hold">
+                            <p:stCondLst>
+                              <p:cond delay="0"/>
+                            </p:stCondLst>
+                            <p:childTnLst>
+                              <p:par>
+                                <p:cTn id="39" presetID="1" presetClass="entr" presetSubtype="0" fill="hold" grpId="0" nodeType="clickEffect">
+                                  <p:stCondLst>
+                                    <p:cond delay="0"/>
+                                  </p:stCondLst>
+                                  <p:childTnLst>
+                                    <p:set>
+                                      <p:cBhvr>
+                                        <p:cTn id="40" dur="1" fill="hold">
+                                          <p:stCondLst>
+                                            <p:cond delay="0"/>
+                                          </p:stCondLst>
+                                        </p:cTn>
+                                        <p:tgtEl>
+                                          <p:spTgt spid="17"/>
+                                        </p:tgtEl>
+                                        <p:attrNameLst>
+                                          <p:attrName>style.visibility</p:attrName>
+                                        </p:attrNameLst>
+                                      </p:cBhvr>
+                                      <p:to>
+                                        <p:strVal val="visible"/>
+                                      </p:to>
+                                    </p:set>
+                                  </p:childTnLst>
+                                </p:cTn>
+                              </p:par>
+                              <p:par>
+                                <p:cTn id="41" presetID="1" presetClass="entr" presetSubtype="0" fill="hold" grpId="0" nodeType="withEffect">
+                                  <p:stCondLst>
+                                    <p:cond delay="0"/>
+                                  </p:stCondLst>
+                                  <p:childTnLst>
+                                    <p:set>
+                                      <p:cBhvr>
+                                        <p:cTn id="42" dur="1" fill="hold">
+                                          <p:stCondLst>
+                                            <p:cond delay="0"/>
+                                          </p:stCondLst>
+                                        </p:cTn>
+                                        <p:tgtEl>
+                                          <p:spTgt spid="18"/>
+                                        </p:tgtEl>
+                                        <p:attrNameLst>
+                                          <p:attrName>style.visibility</p:attrName>
+                                        </p:attrNameLst>
+                                      </p:cBhvr>
+                                      <p:to>
+                                        <p:strVal val="visible"/>
+                                      </p:to>
+                                    </p:set>
+                                  </p:childTnLst>
+                                </p:cTn>
+                              </p:par>
+                            </p:childTnLst>
+                          </p:cTn>
+                        </p:par>
+                      </p:childTnLst>
+                    </p:cTn>
+                  </p:par>
+                </p:childTnLst>
+              </p:cTn>
+              <p:prevCondLst>
+                <p:cond evt="onPrev" delay="0">
+                  <p:tgtEl>
+                    <p:sldTgt/>
+                  </p:tgtEl>
+                </p:cond>
+              </p:prevCondLst>
+              <p:nextCondLst>
+                <p:cond evt="onNext" delay="0">
+                  <p:tgtEl>
+                    <p:sldTgt/>
+                  </p:tgtEl>
+                </p:cond>
+              </p:nextCondLst>
+            </p:seq>
+          </p:childTnLst>
+        </p:cTn>
+      </p:par>
+    </p:tnLst>
+    <p:bldLst>
+      <p:bldP spid="5" grpId="0" animBg="1"/>
+      <p:bldP spid="7" grpId="0" animBg="1"/>
+      <p:bldP spid="8" grpId="0" animBg="1"/>
+      <p:bldP spid="10" grpId="0" animBg="1"/>
+      <p:bldP spid="11" grpId="0" animBg="1"/>
+      <p:bldP spid="13" grpId="0" animBg="1"/>
+      <p:bldP spid="14" grpId="0" animBg="1"/>
+      <p:bldP spid="16" grpId="0" animBg="1"/>
+      <p:bldP spid="17" grpId="0" animBg="1"/>
+      <p:bldP spid="18" grpId="0" animBg="1"/>
+    </p:bldLst>
+  </p:timing>
+</p:sld>
+</file>
+
+<file path=ppt/slides/slide11.xml><?xml version="1.0" encoding="utf-8"?>
 <p:sld xmlns:a="http://schemas.openxmlformats.org/drawingml/2006/main" xmlns:r="http://schemas.openxmlformats.org/officeDocument/2006/relationships" xmlns:p="http://schemas.openxmlformats.org/presentationml/2006/main">
   <p:cSld name="Slide 11">
     <p:bg>
@@ -2412,7 +3777,7 @@
                   <a:srgbClr val="000000"/>
                 </a:solidFill>
               </a:rPr>
-              <a:t xml:space="preserve">    </a:t>
+              <a:t>    </a:t>
             </a:r>
             <a:endParaRPr lang="en-US" sz="5200" dirty="0"/>
           </a:p>
@@ -2427,7 +3792,7 @@
           <p:nvPr/>
         </p:nvPicPr>
         <p:blipFill>
-          <a:blip r:embed="rId100"/>
+          <a:blip r:embed="rId3"/>
           <a:stretch>
             <a:fillRect/>
           </a:stretch>
@@ -2543,7 +3908,7 @@
                 <a:ea typeface="Arial" pitchFamily="34" charset="-122"/>
                 <a:cs typeface="Arial" pitchFamily="34" charset="-120"/>
               </a:rPr>
-              <a:t xml:space="preserve">      </a:t>
+              <a:t>      </a:t>
             </a:r>
             <a:r>
               <a:rPr lang="tr-TR" sz="1700" b="1" dirty="0">
@@ -2620,7 +3985,7 @@
           <p:nvPr/>
         </p:nvPicPr>
         <p:blipFill>
-          <a:blip r:embed="rId101"/>
+          <a:blip r:embed="rId4"/>
           <a:stretch>
             <a:fillRect/>
           </a:stretch>
@@ -2933,7 +4298,7 @@
 </p:sld>
 </file>
 
-<file path=ppt/slides/slide11.xml><?xml version="1.0" encoding="utf-8"?>
+<file path=ppt/slides/slide12.xml><?xml version="1.0" encoding="utf-8"?>
 <p:sld xmlns:a="http://schemas.openxmlformats.org/drawingml/2006/main" xmlns:r="http://schemas.openxmlformats.org/officeDocument/2006/relationships" xmlns:p="http://schemas.openxmlformats.org/presentationml/2006/main">
   <p:cSld name="Slide 12">
     <p:bg>
@@ -2988,7 +4353,7 @@
                   <a:srgbClr val="000000"/>
                 </a:solidFill>
               </a:rPr>
-              <a:t xml:space="preserve">    </a:t>
+              <a:t>    </a:t>
             </a:r>
             <a:endParaRPr lang="en-US" sz="2800" dirty="0"/>
           </a:p>
@@ -3003,7 +4368,7 @@
           <p:nvPr/>
         </p:nvPicPr>
         <p:blipFill>
-          <a:blip r:embed="rId100"/>
+          <a:blip r:embed="rId3"/>
           <a:stretch>
             <a:fillRect/>
           </a:stretch>
@@ -3048,7 +4413,7 @@
                   <a:srgbClr val="000000"/>
                 </a:solidFill>
               </a:rPr>
-              <a:t xml:space="preserve">    </a:t>
+              <a:t>    </a:t>
             </a:r>
             <a:endParaRPr lang="en-US" sz="2200" dirty="0"/>
           </a:p>
@@ -3063,7 +4428,7 @@
           <p:nvPr/>
         </p:nvPicPr>
         <p:blipFill>
-          <a:blip r:embed="rId100"/>
+          <a:blip r:embed="rId3"/>
           <a:stretch>
             <a:fillRect/>
           </a:stretch>
@@ -3108,7 +4473,7 @@
                   <a:srgbClr val="000000"/>
                 </a:solidFill>
               </a:rPr>
-              <a:t xml:space="preserve">    </a:t>
+              <a:t>    </a:t>
             </a:r>
             <a:endParaRPr lang="en-US" sz="2000" dirty="0"/>
           </a:p>
@@ -3123,7 +4488,7 @@
           <p:nvPr/>
         </p:nvPicPr>
         <p:blipFill>
-          <a:blip r:embed="rId101"/>
+          <a:blip r:embed="rId4"/>
           <a:stretch>
             <a:fillRect/>
           </a:stretch>
@@ -3168,7 +4533,7 @@
                   <a:srgbClr val="000000"/>
                 </a:solidFill>
               </a:rPr>
-              <a:t xml:space="preserve">    </a:t>
+              <a:t>    </a:t>
             </a:r>
             <a:endParaRPr lang="en-US" sz="1800" dirty="0"/>
           </a:p>
@@ -3183,7 +4548,7 @@
           <p:nvPr/>
         </p:nvPicPr>
         <p:blipFill>
-          <a:blip r:embed="rId101"/>
+          <a:blip r:embed="rId4"/>
           <a:stretch>
             <a:fillRect/>
           </a:stretch>
@@ -3228,7 +4593,7 @@
                   <a:srgbClr val="000000"/>
                 </a:solidFill>
               </a:rPr>
-              <a:t xml:space="preserve">    </a:t>
+              <a:t>    </a:t>
             </a:r>
             <a:endParaRPr lang="en-US" sz="5200" dirty="0"/>
           </a:p>
@@ -3243,7 +4608,7 @@
           <p:nvPr/>
         </p:nvPicPr>
         <p:blipFill>
-          <a:blip r:embed="rId102"/>
+          <a:blip r:embed="rId5"/>
           <a:stretch>
             <a:fillRect/>
           </a:stretch>
@@ -3574,7 +4939,7 @@
                 <a:ea typeface="Arial" pitchFamily="34" charset="-122"/>
                 <a:cs typeface="Arial" pitchFamily="34" charset="-120"/>
               </a:rPr>
-              <a:t xml:space="preserve">Bir sonraki görevde görüşürüz, hoşça kal!     </a:t>
+              <a:t>Bir sonraki görevde görüşürüz, hoşça kal!     </a:t>
             </a:r>
             <a:endParaRPr lang="en-US" sz="1600" dirty="0"/>
           </a:p>
@@ -3589,7 +4954,7 @@
           <p:nvPr/>
         </p:nvPicPr>
         <p:blipFill>
-          <a:blip r:embed="rId103"/>
+          <a:blip r:embed="rId6"/>
           <a:stretch>
             <a:fillRect/>
           </a:stretch>
@@ -3612,7 +4977,7 @@
 </p:sld>
 </file>
 
-<file path=ppt/slides/slide12.xml><?xml version="1.0" encoding="utf-8"?>
+<file path=ppt/slides/slide2.xml><?xml version="1.0" encoding="utf-8"?>
 <p:sld xmlns:a="http://schemas.openxmlformats.org/drawingml/2006/main" xmlns:r="http://schemas.openxmlformats.org/officeDocument/2006/relationships" xmlns:p="http://schemas.openxmlformats.org/presentationml/2006/main">
   <p:cSld name="Bugünkü Görevimiz">
     <p:bg>
@@ -3690,7 +5055,7 @@
                 <a:ea typeface="Arial" pitchFamily="34" charset="-122"/>
                 <a:cs typeface="Arial" pitchFamily="34" charset="-120"/>
               </a:rPr>
-              <a:t xml:space="preserve">BUGÜNKÜ GÖREVİMİZ</a:t>
+              <a:t>BUGÜNKÜ GÖREVİMİZ</a:t>
             </a:r>
           </a:p>
         </p:txBody>
@@ -3728,8 +5093,49 @@
                 <a:ea typeface="Arial" pitchFamily="34" charset="-122"/>
                 <a:cs typeface="Arial" pitchFamily="34" charset="-120"/>
               </a:rPr>
-              <a:t xml:space="preserve">2026 TTKD Öğretim Programı — 2. Seviye: 1B1, 1B2, 1B3; 3. Seviye: 1A2, 1B2, 3A5</a:t>
+              <a:t>2026 TTKD Öğretim Programı — 2. Seviye: </a:t>
             </a:r>
+            <a:r>
+              <a:rPr lang="tr-TR" sz="1000" dirty="0" smtClean="0">
+                <a:solidFill>
+                  <a:srgbClr val="94A3B8"/>
+                </a:solidFill>
+                <a:latin typeface="Arial" pitchFamily="34" charset="0"/>
+                <a:ea typeface="Arial" pitchFamily="34" charset="-122"/>
+                <a:cs typeface="Arial" pitchFamily="34" charset="-120"/>
+              </a:rPr>
+              <a:t>1B1</a:t>
+            </a:r>
+            <a:r>
+              <a:rPr lang="tr-TR" sz="1000" smtClean="0">
+                <a:solidFill>
+                  <a:srgbClr val="94A3B8"/>
+                </a:solidFill>
+                <a:latin typeface="Arial" pitchFamily="34" charset="0"/>
+                <a:ea typeface="Arial" pitchFamily="34" charset="-122"/>
+                <a:cs typeface="Arial" pitchFamily="34" charset="-120"/>
+              </a:rPr>
+              <a:t>, </a:t>
+            </a:r>
+            <a:r>
+              <a:rPr lang="tr-TR" sz="1000" smtClean="0">
+                <a:solidFill>
+                  <a:srgbClr val="94A3B8"/>
+                </a:solidFill>
+                <a:latin typeface="Arial" pitchFamily="34" charset="0"/>
+                <a:ea typeface="Arial" pitchFamily="34" charset="-122"/>
+                <a:cs typeface="Arial" pitchFamily="34" charset="-120"/>
+              </a:rPr>
+              <a:t>1B2</a:t>
+            </a:r>
+            <a:endParaRPr lang="tr-TR" sz="1000" dirty="0">
+              <a:solidFill>
+                <a:srgbClr val="94A3B8"/>
+              </a:solidFill>
+              <a:latin typeface="Arial" pitchFamily="34" charset="0"/>
+              <a:ea typeface="Arial" pitchFamily="34" charset="-122"/>
+              <a:cs typeface="Arial" pitchFamily="34" charset="-120"/>
+            </a:endParaRPr>
           </a:p>
         </p:txBody>
       </p:sp>
@@ -3795,7 +5201,7 @@
                 <a:ea typeface="Arial" pitchFamily="34" charset="-122"/>
                 <a:cs typeface="Arial" pitchFamily="34" charset="-120"/>
               </a:rPr>
-              <a:t xml:space="preserve">    </a:t>
+              <a:t>    </a:t>
             </a:r>
           </a:p>
         </p:txBody>
@@ -3809,7 +5215,7 @@
           <p:nvPr/>
         </p:nvPicPr>
         <p:blipFill>
-          <a:blip r:embed="rId100"/>
+          <a:blip r:embed="rId3"/>
           <a:stretch>
             <a:fillRect/>
           </a:stretch>
@@ -3857,7 +5263,7 @@
                 <a:ea typeface="Arial" pitchFamily="34" charset="-122"/>
                 <a:cs typeface="Arial" pitchFamily="34" charset="-120"/>
               </a:rPr>
-              <a:t xml:space="preserve">1. 1'den 20'ye kadar saymayı öğreneceğiz</a:t>
+              <a:t>1. 1'den 20'ye kadar saymayı öğreneceğiz</a:t>
             </a:r>
           </a:p>
         </p:txBody>
@@ -3924,7 +5330,7 @@
                 <a:ea typeface="Arial" pitchFamily="34" charset="-122"/>
                 <a:cs typeface="Arial" pitchFamily="34" charset="-120"/>
               </a:rPr>
-              <a:t xml:space="preserve">    </a:t>
+              <a:t>    </a:t>
             </a:r>
           </a:p>
         </p:txBody>
@@ -3938,7 +5344,7 @@
           <p:nvPr/>
         </p:nvPicPr>
         <p:blipFill>
-          <a:blip r:embed="rId101"/>
+          <a:blip r:embed="rId4"/>
           <a:stretch>
             <a:fillRect/>
           </a:stretch>
@@ -3986,7 +5392,7 @@
                 <a:ea typeface="Arial" pitchFamily="34" charset="-122"/>
                 <a:cs typeface="Arial" pitchFamily="34" charset="-120"/>
               </a:rPr>
-              <a:t xml:space="preserve">2. 'Kaç yaşındasın?' diye sorup yaşımızı söyleyeceğiz</a:t>
+              <a:t>2. 'Kaç yaşındasın?' diye sorup yaşımızı söyleyeceğiz</a:t>
             </a:r>
           </a:p>
         </p:txBody>
@@ -4053,7 +5459,7 @@
                 <a:ea typeface="Arial" pitchFamily="34" charset="-122"/>
                 <a:cs typeface="Arial" pitchFamily="34" charset="-120"/>
               </a:rPr>
-              <a:t xml:space="preserve">    </a:t>
+              <a:t>    </a:t>
             </a:r>
           </a:p>
         </p:txBody>
@@ -4067,7 +5473,7 @@
           <p:nvPr/>
         </p:nvPicPr>
         <p:blipFill>
-          <a:blip r:embed="rId102"/>
+          <a:blip r:embed="rId5"/>
           <a:stretch>
             <a:fillRect/>
           </a:stretch>
@@ -4115,7 +5521,7 @@
                 <a:ea typeface="Arial" pitchFamily="34" charset="-122"/>
                 <a:cs typeface="Arial" pitchFamily="34" charset="-120"/>
               </a:rPr>
-              <a:t xml:space="preserve">3. 'İyi ki doğdun!' diyerek doğum günü kutlayacağız</a:t>
+              <a:t>3. 'İyi ki doğdun!' diyerek doğum günü kutlayacağız</a:t>
             </a:r>
           </a:p>
         </p:txBody>
@@ -4182,7 +5588,7 @@
                 <a:ea typeface="Arial" pitchFamily="34" charset="-122"/>
                 <a:cs typeface="Arial" pitchFamily="34" charset="-120"/>
               </a:rPr>
-              <a:t xml:space="preserve">      Hazır mısın?</a:t>
+              <a:t>      Hazır mısın?</a:t>
             </a:r>
           </a:p>
         </p:txBody>
@@ -4196,7 +5602,7 @@
           <p:nvPr/>
         </p:nvPicPr>
         <p:blipFill>
-          <a:blip r:embed="rId103"/>
+          <a:blip r:embed="rId6"/>
           <a:stretch>
             <a:fillRect/>
           </a:stretch>
@@ -4205,755 +5611,6 @@
           <a:xfrm>
             <a:off x="3714583" y="3986784"/>
             <a:ext cx="228600" cy="228600"/>
-          </a:xfrm>
-          <a:prstGeom prst="rect">
-            <a:avLst/>
-          </a:prstGeom>
-        </p:spPr>
-      </p:pic>
-    </p:spTree>
-  </p:cSld>
-  <p:clrMapOvr>
-    <a:masterClrMapping/>
-  </p:clrMapOvr>
-  <p:timing>
-    <p:tnLst>
-      <p:par>
-        <p:cTn id="1" dur="indefinite" restart="never" nodeType="tmRoot">
-          <p:childTnLst>
-            <p:seq concurrent="1" nextAc="seek">
-              <p:cTn id="2" dur="indefinite" nodeType="mainSeq">
-                <p:childTnLst>
-                  <p:par>
-                    <p:cTn id="3" fill="hold">
-                      <p:stCondLst>
-                        <p:cond delay="indefinite"/>
-                      </p:stCondLst>
-                      <p:childTnLst>
-                        <p:par>
-                          <p:cTn id="4" fill="hold">
-                            <p:stCondLst>
-                              <p:cond delay="0"/>
-                            </p:stCondLst>
-                            <p:childTnLst>
-                              <p:par>
-                                <p:cTn id="5" presetID="1" presetClass="entr" presetSubtype="0" fill="hold" grpId="0" nodeType="clickEffect">
-                                  <p:stCondLst>
-                                    <p:cond delay="0"/>
-                                  </p:stCondLst>
-                                  <p:childTnLst>
-                                    <p:set>
-                                      <p:cBhvr>
-                                        <p:cTn id="6" dur="1" fill="hold">
-                                          <p:stCondLst>
-                                            <p:cond delay="0"/>
-                                          </p:stCondLst>
-                                        </p:cTn>
-                                        <p:tgtEl>
-                                          <p:spTgt spid="4"/>
-                                        </p:tgtEl>
-                                        <p:attrNameLst>
-                                          <p:attrName>style.visibility</p:attrName>
-                                        </p:attrNameLst>
-                                      </p:cBhvr>
-                                      <p:to>
-                                        <p:strVal val="visible"/>
-                                      </p:to>
-                                    </p:set>
-                                  </p:childTnLst>
-                                </p:cTn>
-                              </p:par>
-                            </p:childTnLst>
-                          </p:cTn>
-                        </p:par>
-                      </p:childTnLst>
-                    </p:cTn>
-                  </p:par>
-                  <p:par>
-                    <p:cTn id="7" fill="hold">
-                      <p:stCondLst>
-                        <p:cond delay="indefinite"/>
-                      </p:stCondLst>
-                      <p:childTnLst>
-                        <p:par>
-                          <p:cTn id="8" fill="hold">
-                            <p:stCondLst>
-                              <p:cond delay="0"/>
-                            </p:stCondLst>
-                            <p:childTnLst>
-                              <p:par>
-                                <p:cTn id="9" presetID="1" presetClass="entr" presetSubtype="0" fill="hold" nodeType="clickEffect">
-                                  <p:stCondLst>
-                                    <p:cond delay="0"/>
-                                  </p:stCondLst>
-                                  <p:childTnLst>
-                                    <p:set>
-                                      <p:cBhvr>
-                                        <p:cTn id="10" dur="1" fill="hold">
-                                          <p:stCondLst>
-                                            <p:cond delay="0"/>
-                                          </p:stCondLst>
-                                        </p:cTn>
-                                        <p:tgtEl>
-                                          <p:spTgt spid="5"/>
-                                        </p:tgtEl>
-                                        <p:attrNameLst>
-                                          <p:attrName>style.visibility</p:attrName>
-                                        </p:attrNameLst>
-                                      </p:cBhvr>
-                                      <p:to>
-                                        <p:strVal val="visible"/>
-                                      </p:to>
-                                    </p:set>
-                                  </p:childTnLst>
-                                </p:cTn>
-                              </p:par>
-                              <p:par>
-                                <p:cTn id="11" presetID="1" presetClass="entr" presetSubtype="0" fill="hold" grpId="0" nodeType="withEffect">
-                                  <p:stCondLst>
-                                    <p:cond delay="0"/>
-                                  </p:stCondLst>
-                                  <p:childTnLst>
-                                    <p:set>
-                                      <p:cBhvr>
-                                        <p:cTn id="12" dur="1" fill="hold">
-                                          <p:stCondLst>
-                                            <p:cond delay="0"/>
-                                          </p:stCondLst>
-                                        </p:cTn>
-                                        <p:tgtEl>
-                                          <p:spTgt spid="6"/>
-                                        </p:tgtEl>
-                                        <p:attrNameLst>
-                                          <p:attrName>style.visibility</p:attrName>
-                                        </p:attrNameLst>
-                                      </p:cBhvr>
-                                      <p:to>
-                                        <p:strVal val="visible"/>
-                                      </p:to>
-                                    </p:set>
-                                  </p:childTnLst>
-                                </p:cTn>
-                              </p:par>
-                            </p:childTnLst>
-                          </p:cTn>
-                        </p:par>
-                      </p:childTnLst>
-                    </p:cTn>
-                  </p:par>
-                  <p:par>
-                    <p:cTn id="13" fill="hold">
-                      <p:stCondLst>
-                        <p:cond delay="indefinite"/>
-                      </p:stCondLst>
-                      <p:childTnLst>
-                        <p:par>
-                          <p:cTn id="14" fill="hold">
-                            <p:stCondLst>
-                              <p:cond delay="0"/>
-                            </p:stCondLst>
-                            <p:childTnLst>
-                              <p:par>
-                                <p:cTn id="15" presetID="1" presetClass="entr" presetSubtype="0" fill="hold" nodeType="clickEffect">
-                                  <p:stCondLst>
-                                    <p:cond delay="0"/>
-                                  </p:stCondLst>
-                                  <p:childTnLst>
-                                    <p:set>
-                                      <p:cBhvr>
-                                        <p:cTn id="16" dur="1" fill="hold">
-                                          <p:stCondLst>
-                                            <p:cond delay="0"/>
-                                          </p:stCondLst>
-                                        </p:cTn>
-                                        <p:tgtEl>
-                                          <p:spTgt spid="7"/>
-                                        </p:tgtEl>
-                                        <p:attrNameLst>
-                                          <p:attrName>style.visibility</p:attrName>
-                                        </p:attrNameLst>
-                                      </p:cBhvr>
-                                      <p:to>
-                                        <p:strVal val="visible"/>
-                                      </p:to>
-                                    </p:set>
-                                  </p:childTnLst>
-                                </p:cTn>
-                              </p:par>
-                              <p:par>
-                                <p:cTn id="17" presetID="1" presetClass="entr" presetSubtype="0" fill="hold" grpId="0" nodeType="withEffect">
-                                  <p:stCondLst>
-                                    <p:cond delay="0"/>
-                                  </p:stCondLst>
-                                  <p:childTnLst>
-                                    <p:set>
-                                      <p:cBhvr>
-                                        <p:cTn id="18" dur="1" fill="hold">
-                                          <p:stCondLst>
-                                            <p:cond delay="0"/>
-                                          </p:stCondLst>
-                                        </p:cTn>
-                                        <p:tgtEl>
-                                          <p:spTgt spid="8"/>
-                                        </p:tgtEl>
-                                        <p:attrNameLst>
-                                          <p:attrName>style.visibility</p:attrName>
-                                        </p:attrNameLst>
-                                      </p:cBhvr>
-                                      <p:to>
-                                        <p:strVal val="visible"/>
-                                      </p:to>
-                                    </p:set>
-                                  </p:childTnLst>
-                                </p:cTn>
-                              </p:par>
-                            </p:childTnLst>
-                          </p:cTn>
-                        </p:par>
-                      </p:childTnLst>
-                    </p:cTn>
-                  </p:par>
-                  <p:par>
-                    <p:cTn id="19" fill="hold">
-                      <p:stCondLst>
-                        <p:cond delay="indefinite"/>
-                      </p:stCondLst>
-                      <p:childTnLst>
-                        <p:par>
-                          <p:cTn id="20" fill="hold">
-                            <p:stCondLst>
-                              <p:cond delay="0"/>
-                            </p:stCondLst>
-                            <p:childTnLst>
-                              <p:par>
-                                <p:cTn id="21" presetID="1" presetClass="entr" presetSubtype="0" fill="hold" nodeType="clickEffect">
-                                  <p:stCondLst>
-                                    <p:cond delay="0"/>
-                                  </p:stCondLst>
-                                  <p:childTnLst>
-                                    <p:set>
-                                      <p:cBhvr>
-                                        <p:cTn id="22" dur="1" fill="hold">
-                                          <p:stCondLst>
-                                            <p:cond delay="0"/>
-                                          </p:stCondLst>
-                                        </p:cTn>
-                                        <p:tgtEl>
-                                          <p:spTgt spid="9"/>
-                                        </p:tgtEl>
-                                        <p:attrNameLst>
-                                          <p:attrName>style.visibility</p:attrName>
-                                        </p:attrNameLst>
-                                      </p:cBhvr>
-                                      <p:to>
-                                        <p:strVal val="visible"/>
-                                      </p:to>
-                                    </p:set>
-                                  </p:childTnLst>
-                                </p:cTn>
-                              </p:par>
-                              <p:par>
-                                <p:cTn id="23" presetID="1" presetClass="entr" presetSubtype="0" fill="hold" grpId="0" nodeType="withEffect">
-                                  <p:stCondLst>
-                                    <p:cond delay="0"/>
-                                  </p:stCondLst>
-                                  <p:childTnLst>
-                                    <p:set>
-                                      <p:cBhvr>
-                                        <p:cTn id="24" dur="1" fill="hold">
-                                          <p:stCondLst>
-                                            <p:cond delay="0"/>
-                                          </p:stCondLst>
-                                        </p:cTn>
-                                        <p:tgtEl>
-                                          <p:spTgt spid="10"/>
-                                        </p:tgtEl>
-                                        <p:attrNameLst>
-                                          <p:attrName>style.visibility</p:attrName>
-                                        </p:attrNameLst>
-                                      </p:cBhvr>
-                                      <p:to>
-                                        <p:strVal val="visible"/>
-                                      </p:to>
-                                    </p:set>
-                                  </p:childTnLst>
-                                </p:cTn>
-                              </p:par>
-                            </p:childTnLst>
-                          </p:cTn>
-                        </p:par>
-                      </p:childTnLst>
-                    </p:cTn>
-                  </p:par>
-                </p:childTnLst>
-              </p:cTn>
-              <p:prevCondLst>
-                <p:cond evt="onPrev" delay="0">
-                  <p:tgtEl>
-                    <p:sldTgt/>
-                  </p:tgtEl>
-                </p:cond>
-              </p:prevCondLst>
-              <p:nextCondLst>
-                <p:cond evt="onNext" delay="0">
-                  <p:tgtEl>
-                    <p:sldTgt/>
-                  </p:tgtEl>
-                </p:cond>
-              </p:nextCondLst>
-            </p:seq>
-          </p:childTnLst>
-        </p:cTn>
-      </p:par>
-    </p:tnLst>
-    <p:bldLst>
-      <p:bldP spid="4" grpId="0" animBg="1"/>
-      <p:bldP spid="6" grpId="0" animBg="1"/>
-      <p:bldP spid="8" grpId="0" animBg="1"/>
-      <p:bldP spid="10" grpId="0" animBg="1"/>
-    </p:bldLst>
-  </p:timing>
-</p:sld>
-</file>
-
-<file path=ppt/slides/slide2.xml><?xml version="1.0" encoding="utf-8"?>
-<p:sld xmlns:a="http://schemas.openxmlformats.org/drawingml/2006/main" xmlns:r="http://schemas.openxmlformats.org/officeDocument/2006/relationships" xmlns:p="http://schemas.openxmlformats.org/presentationml/2006/main">
-  <p:cSld name="Slide 2">
-    <p:bg>
-      <p:bgPr>
-        <a:solidFill>
-          <a:srgbClr val="EDE9FE"/>
-        </a:solidFill>
-        <a:effectLst/>
-      </p:bgPr>
-    </p:bg>
-    <p:spTree>
-      <p:nvGrpSpPr>
-        <p:cNvPr id="1" name=""/>
-        <p:cNvGrpSpPr/>
-        <p:nvPr/>
-      </p:nvGrpSpPr>
-      <p:grpSpPr>
-        <a:xfrm>
-          <a:off x="0" y="0"/>
-          <a:ext cx="0" cy="0"/>
-          <a:chOff x="0" y="0"/>
-          <a:chExt cx="0" cy="0"/>
-        </a:xfrm>
-      </p:grpSpPr>
-      <p:sp>
-        <p:nvSpPr>
-          <p:cNvPr id="2" name="Shape 0"/>
-          <p:cNvSpPr/>
-          <p:nvPr/>
-        </p:nvSpPr>
-        <p:spPr>
-          <a:xfrm>
-            <a:off x="0" y="0"/>
-            <a:ext cx="9144000" cy="914400"/>
-          </a:xfrm>
-          <a:prstGeom prst="rect">
-            <a:avLst/>
-          </a:prstGeom>
-          <a:solidFill>
-            <a:srgbClr val="7C3AED"/>
-          </a:solidFill>
-          <a:ln/>
-        </p:spPr>
-      </p:sp>
-      <p:sp>
-        <p:nvSpPr>
-          <p:cNvPr id="3" name="Text 1"/>
-          <p:cNvSpPr/>
-          <p:nvPr/>
-        </p:nvSpPr>
-        <p:spPr>
-          <a:xfrm>
-            <a:off x="274320" y="91440"/>
-            <a:ext cx="8229600" cy="731520"/>
-          </a:xfrm>
-          <a:prstGeom prst="rect">
-            <a:avLst/>
-          </a:prstGeom>
-          <a:noFill/>
-          <a:ln/>
-        </p:spPr>
-        <p:txBody>
-          <a:bodyPr wrap="square" rtlCol="0" anchor="ctr"/>
-          <a:lstStyle/>
-          <a:p>
-            <a:pPr marL="0" indent="0" algn="ctr">
-              <a:buNone/>
-            </a:pPr>
-            <a:r>
-              <a:rPr lang="en-US" sz="2300" b="1" dirty="0">
-                <a:solidFill>
-                  <a:srgbClr val="FFFFFF"/>
-                </a:solidFill>
-                <a:latin typeface="Arial" pitchFamily="34" charset="0"/>
-                <a:ea typeface="Arial" pitchFamily="34" charset="-122"/>
-                <a:cs typeface="Arial" pitchFamily="34" charset="-120"/>
-              </a:rPr>
-              <a:t xml:space="preserve">      BUGÜN BENİM DOĞUM GÜNÜM!</a:t>
-            </a:r>
-            <a:endParaRPr lang="en-US" sz="2300" dirty="0"/>
-          </a:p>
-        </p:txBody>
-      </p:sp>
-      <p:pic>
-        <p:nvPicPr>
-          <p:cNvPr id="11" name="Emoji 11" descr="emoji"/>
-          <p:cNvPicPr>
-            <a:picLocks noChangeAspect="1"/>
-          </p:cNvPicPr>
-          <p:nvPr/>
-        </p:nvPicPr>
-        <p:blipFill>
-          <a:blip r:embed="rId100"/>
-          <a:stretch>
-            <a:fillRect/>
-          </a:stretch>
-        </p:blipFill>
-        <p:spPr>
-          <a:xfrm>
-            <a:off x="1873958" y="311150"/>
-            <a:ext cx="292100" cy="292100"/>
-          </a:xfrm>
-          <a:prstGeom prst="rect">
-            <a:avLst/>
-          </a:prstGeom>
-        </p:spPr>
-      </p:pic>
-      <p:sp>
-        <p:nvSpPr>
-          <p:cNvPr id="4" name="Text 2"/>
-          <p:cNvSpPr/>
-          <p:nvPr/>
-        </p:nvSpPr>
-        <p:spPr>
-          <a:xfrm>
-            <a:off x="3566160" y="1051560"/>
-            <a:ext cx="2011680" cy="1463040"/>
-          </a:xfrm>
-          <a:prstGeom prst="rect">
-            <a:avLst/>
-          </a:prstGeom>
-          <a:noFill/>
-          <a:ln/>
-        </p:spPr>
-        <p:txBody>
-          <a:bodyPr wrap="square" rtlCol="0" anchor="ctr"/>
-          <a:lstStyle/>
-          <a:p>
-            <a:pPr marL="0" indent="0" algn="ctr">
-              <a:buNone/>
-            </a:pPr>
-            <a:r>
-              <a:rPr lang="en-US" sz="7000" dirty="0">
-                <a:solidFill>
-                  <a:srgbClr val="000000"/>
-                </a:solidFill>
-              </a:rPr>
-              <a:t xml:space="preserve">    </a:t>
-            </a:r>
-            <a:endParaRPr lang="en-US" sz="7000" dirty="0"/>
-          </a:p>
-        </p:txBody>
-      </p:sp>
-      <p:pic>
-        <p:nvPicPr>
-          <p:cNvPr id="12" name="Emoji 12" descr="emoji"/>
-          <p:cNvPicPr>
-            <a:picLocks noChangeAspect="1"/>
-          </p:cNvPicPr>
-          <p:nvPr/>
-        </p:nvPicPr>
-        <p:blipFill>
-          <a:blip r:embed="rId101"/>
-          <a:stretch>
-            <a:fillRect/>
-          </a:stretch>
-        </p:blipFill>
-        <p:spPr>
-          <a:xfrm>
-            <a:off x="4127500" y="1338580"/>
-            <a:ext cx="889000" cy="889000"/>
-          </a:xfrm>
-          <a:prstGeom prst="rect">
-            <a:avLst/>
-          </a:prstGeom>
-        </p:spPr>
-      </p:pic>
-      <p:sp>
-        <p:nvSpPr>
-          <p:cNvPr id="5" name="Shape 3"/>
-          <p:cNvSpPr/>
-          <p:nvPr/>
-        </p:nvSpPr>
-        <p:spPr>
-          <a:xfrm>
-            <a:off x="817510" y="2628901"/>
-            <a:ext cx="7315200" cy="731520"/>
-          </a:xfrm>
-          <a:prstGeom prst="roundRect">
-            <a:avLst>
-              <a:gd name="adj" fmla="val 18750"/>
-            </a:avLst>
-          </a:prstGeom>
-          <a:solidFill>
-            <a:srgbClr val="7C3AED"/>
-          </a:solidFill>
-          <a:ln/>
-          <a:effectLst>
-            <a:outerShdw blurRad="101600" dist="38100" dir="2700000" algn="bl" rotWithShape="0">
-              <a:srgbClr val="000000">
-                <a:alpha val="15000"/>
-              </a:srgbClr>
-            </a:outerShdw>
-          </a:effectLst>
-        </p:spPr>
-      </p:sp>
-      <p:sp>
-        <p:nvSpPr>
-          <p:cNvPr id="6" name="Text 4"/>
-          <p:cNvSpPr/>
-          <p:nvPr/>
-        </p:nvSpPr>
-        <p:spPr>
-          <a:xfrm>
-            <a:off x="914400" y="2651760"/>
-            <a:ext cx="7315200" cy="731520"/>
-          </a:xfrm>
-          <a:prstGeom prst="rect">
-            <a:avLst/>
-          </a:prstGeom>
-          <a:noFill/>
-          <a:ln/>
-        </p:spPr>
-        <p:txBody>
-          <a:bodyPr wrap="square" rtlCol="0" anchor="ctr"/>
-          <a:lstStyle/>
-          <a:p>
-            <a:pPr marL="0" indent="0" algn="ctr">
-              <a:buNone/>
-            </a:pPr>
-            <a:r>
-              <a:rPr lang="en-US" sz="2600" b="1" dirty="0">
-                <a:solidFill>
-                  <a:srgbClr val="FFFFFF"/>
-                </a:solidFill>
-                <a:latin typeface="Arial" pitchFamily="34" charset="0"/>
-                <a:ea typeface="Arial" pitchFamily="34" charset="-122"/>
-                <a:cs typeface="Arial" pitchFamily="34" charset="-120"/>
-              </a:rPr>
-              <a:t xml:space="preserve">      İyi ki doğdun!</a:t>
-            </a:r>
-            <a:endParaRPr lang="en-US" sz="2600" dirty="0"/>
-          </a:p>
-        </p:txBody>
-      </p:sp>
-      <p:pic>
-        <p:nvPicPr>
-          <p:cNvPr id="13" name="Emoji 13" descr="emoji"/>
-          <p:cNvPicPr>
-            <a:picLocks noChangeAspect="1"/>
-          </p:cNvPicPr>
-          <p:nvPr/>
-        </p:nvPicPr>
-        <p:blipFill>
-          <a:blip r:embed="rId102"/>
-          <a:stretch>
-            <a:fillRect/>
-          </a:stretch>
-        </p:blipFill>
-        <p:spPr>
-          <a:xfrm>
-            <a:off x="3242088" y="2852420"/>
-            <a:ext cx="330200" cy="330200"/>
-          </a:xfrm>
-          <a:prstGeom prst="rect">
-            <a:avLst/>
-          </a:prstGeom>
-        </p:spPr>
-      </p:pic>
-      <p:sp>
-        <p:nvSpPr>
-          <p:cNvPr id="7" name="Shape 5"/>
-          <p:cNvSpPr/>
-          <p:nvPr/>
-        </p:nvSpPr>
-        <p:spPr>
-          <a:xfrm>
-            <a:off x="3017520" y="3520440"/>
-            <a:ext cx="3108960" cy="502920"/>
-          </a:xfrm>
-          <a:prstGeom prst="roundRect">
-            <a:avLst>
-              <a:gd name="adj" fmla="val 49091"/>
-            </a:avLst>
-          </a:prstGeom>
-          <a:solidFill>
-            <a:srgbClr val="DC2626"/>
-          </a:solidFill>
-          <a:ln/>
-          <a:effectLst>
-            <a:outerShdw blurRad="101600" dist="38100" dir="2700000" algn="bl" rotWithShape="0">
-              <a:srgbClr val="000000">
-                <a:alpha val="15000"/>
-              </a:srgbClr>
-            </a:outerShdw>
-          </a:effectLst>
-        </p:spPr>
-      </p:sp>
-      <p:sp>
-        <p:nvSpPr>
-          <p:cNvPr id="8" name="Text 6"/>
-          <p:cNvSpPr/>
-          <p:nvPr/>
-        </p:nvSpPr>
-        <p:spPr>
-          <a:xfrm>
-            <a:off x="3017520" y="3520440"/>
-            <a:ext cx="3108960" cy="502920"/>
-          </a:xfrm>
-          <a:prstGeom prst="rect">
-            <a:avLst/>
-          </a:prstGeom>
-          <a:noFill/>
-          <a:ln/>
-        </p:spPr>
-        <p:txBody>
-          <a:bodyPr wrap="square" rtlCol="0" anchor="ctr"/>
-          <a:lstStyle/>
-          <a:p>
-            <a:pPr marL="0" indent="0" algn="ctr">
-              <a:buNone/>
-            </a:pPr>
-            <a:r>
-              <a:rPr lang="en-US" sz="1400" b="1" dirty="0">
-                <a:solidFill>
-                  <a:srgbClr val="FFFFFF"/>
-                </a:solidFill>
-                <a:latin typeface="Arial" pitchFamily="34" charset="0"/>
-                <a:ea typeface="Arial" pitchFamily="34" charset="-122"/>
-                <a:cs typeface="Arial" pitchFamily="34" charset="-120"/>
-              </a:rPr>
-              <a:t xml:space="preserve">      Sen de Söyle!</a:t>
-            </a:r>
-            <a:endParaRPr lang="en-US" sz="1400" dirty="0"/>
-          </a:p>
-        </p:txBody>
-      </p:sp>
-      <p:pic>
-        <p:nvPicPr>
-          <p:cNvPr id="14" name="Emoji 14" descr="emoji"/>
-          <p:cNvPicPr>
-            <a:picLocks noChangeAspect="1"/>
-          </p:cNvPicPr>
-          <p:nvPr/>
-        </p:nvPicPr>
-        <p:blipFill>
-          <a:blip r:embed="rId103"/>
-          <a:stretch>
-            <a:fillRect/>
-          </a:stretch>
-        </p:blipFill>
-        <p:spPr>
-          <a:xfrm>
-            <a:off x="3850726" y="3683000"/>
-            <a:ext cx="177800" cy="177800"/>
-          </a:xfrm>
-          <a:prstGeom prst="rect">
-            <a:avLst/>
-          </a:prstGeom>
-        </p:spPr>
-      </p:pic>
-      <p:sp>
-        <p:nvSpPr>
-          <p:cNvPr id="9" name="Shape 7"/>
-          <p:cNvSpPr/>
-          <p:nvPr/>
-        </p:nvSpPr>
-        <p:spPr>
-          <a:xfrm>
-            <a:off x="1371600" y="4206240"/>
-            <a:ext cx="6400800" cy="731520"/>
-          </a:xfrm>
-          <a:prstGeom prst="roundRect">
-            <a:avLst>
-              <a:gd name="adj" fmla="val 18750"/>
-            </a:avLst>
-          </a:prstGeom>
-          <a:solidFill>
-            <a:srgbClr val="FFFFFF"/>
-          </a:solidFill>
-          <a:ln/>
-          <a:effectLst>
-            <a:outerShdw blurRad="101600" dist="38100" dir="2700000" algn="bl" rotWithShape="0">
-              <a:srgbClr val="000000">
-                <a:alpha val="15000"/>
-              </a:srgbClr>
-            </a:outerShdw>
-          </a:effectLst>
-        </p:spPr>
-      </p:sp>
-      <p:sp>
-        <p:nvSpPr>
-          <p:cNvPr id="10" name="Text 8"/>
-          <p:cNvSpPr/>
-          <p:nvPr/>
-        </p:nvSpPr>
-        <p:spPr>
-          <a:xfrm>
-            <a:off x="1463040" y="4251960"/>
-            <a:ext cx="6217920" cy="640080"/>
-          </a:xfrm>
-          <a:prstGeom prst="rect">
-            <a:avLst/>
-          </a:prstGeom>
-          <a:noFill/>
-          <a:ln/>
-        </p:spPr>
-        <p:txBody>
-          <a:bodyPr wrap="square" rtlCol="0" anchor="ctr"/>
-          <a:lstStyle/>
-          <a:p>
-            <a:pPr marL="0" indent="0" algn="ctr">
-              <a:buNone/>
-            </a:pPr>
-            <a:r>
-              <a:rPr lang="en-US" sz="1400" b="1" dirty="0">
-                <a:solidFill>
-                  <a:srgbClr val="7C3AED"/>
-                </a:solidFill>
-                <a:latin typeface="Arial" pitchFamily="34" charset="0"/>
-                <a:ea typeface="Arial" pitchFamily="34" charset="-122"/>
-                <a:cs typeface="Arial" pitchFamily="34" charset="-120"/>
-              </a:rPr>
-              <a:t xml:space="preserve">      Peki ben kaç yaşındayım? Hadi mumları sayalım!</a:t>
-            </a:r>
-            <a:endParaRPr lang="en-US" sz="1400" dirty="0"/>
-          </a:p>
-        </p:txBody>
-      </p:sp>
-      <p:pic>
-        <p:nvPicPr>
-          <p:cNvPr id="15" name="Emoji 15" descr="emoji"/>
-          <p:cNvPicPr>
-            <a:picLocks noChangeAspect="1"/>
-          </p:cNvPicPr>
-          <p:nvPr/>
-        </p:nvPicPr>
-        <p:blipFill>
-          <a:blip r:embed="rId104"/>
-          <a:stretch>
-            <a:fillRect/>
-          </a:stretch>
-        </p:blipFill>
-        <p:spPr>
-          <a:xfrm>
-            <a:off x="2363387" y="4483100"/>
-            <a:ext cx="177800" cy="177800"/>
           </a:xfrm>
           <a:prstGeom prst="rect">
             <a:avLst/>
@@ -5267,6 +5924,755 @@
 
 <file path=ppt/slides/slide3.xml><?xml version="1.0" encoding="utf-8"?>
 <p:sld xmlns:a="http://schemas.openxmlformats.org/drawingml/2006/main" xmlns:r="http://schemas.openxmlformats.org/officeDocument/2006/relationships" xmlns:p="http://schemas.openxmlformats.org/presentationml/2006/main">
+  <p:cSld name="Slide 2">
+    <p:bg>
+      <p:bgPr>
+        <a:solidFill>
+          <a:srgbClr val="EDE9FE"/>
+        </a:solidFill>
+        <a:effectLst/>
+      </p:bgPr>
+    </p:bg>
+    <p:spTree>
+      <p:nvGrpSpPr>
+        <p:cNvPr id="1" name=""/>
+        <p:cNvGrpSpPr/>
+        <p:nvPr/>
+      </p:nvGrpSpPr>
+      <p:grpSpPr>
+        <a:xfrm>
+          <a:off x="0" y="0"/>
+          <a:ext cx="0" cy="0"/>
+          <a:chOff x="0" y="0"/>
+          <a:chExt cx="0" cy="0"/>
+        </a:xfrm>
+      </p:grpSpPr>
+      <p:sp>
+        <p:nvSpPr>
+          <p:cNvPr id="2" name="Shape 0"/>
+          <p:cNvSpPr/>
+          <p:nvPr/>
+        </p:nvSpPr>
+        <p:spPr>
+          <a:xfrm>
+            <a:off x="0" y="0"/>
+            <a:ext cx="9144000" cy="914400"/>
+          </a:xfrm>
+          <a:prstGeom prst="rect">
+            <a:avLst/>
+          </a:prstGeom>
+          <a:solidFill>
+            <a:srgbClr val="7C3AED"/>
+          </a:solidFill>
+          <a:ln/>
+        </p:spPr>
+      </p:sp>
+      <p:sp>
+        <p:nvSpPr>
+          <p:cNvPr id="3" name="Text 1"/>
+          <p:cNvSpPr/>
+          <p:nvPr/>
+        </p:nvSpPr>
+        <p:spPr>
+          <a:xfrm>
+            <a:off x="274320" y="91440"/>
+            <a:ext cx="8229600" cy="731520"/>
+          </a:xfrm>
+          <a:prstGeom prst="rect">
+            <a:avLst/>
+          </a:prstGeom>
+          <a:noFill/>
+          <a:ln/>
+        </p:spPr>
+        <p:txBody>
+          <a:bodyPr wrap="square" rtlCol="0" anchor="ctr"/>
+          <a:lstStyle/>
+          <a:p>
+            <a:pPr marL="0" indent="0" algn="ctr">
+              <a:buNone/>
+            </a:pPr>
+            <a:r>
+              <a:rPr lang="en-US" sz="2300" b="1" dirty="0">
+                <a:solidFill>
+                  <a:srgbClr val="FFFFFF"/>
+                </a:solidFill>
+                <a:latin typeface="Arial" pitchFamily="34" charset="0"/>
+                <a:ea typeface="Arial" pitchFamily="34" charset="-122"/>
+                <a:cs typeface="Arial" pitchFamily="34" charset="-120"/>
+              </a:rPr>
+              <a:t>      BUGÜN BENİM DOĞUM GÜNÜM!</a:t>
+            </a:r>
+            <a:endParaRPr lang="en-US" sz="2300" dirty="0"/>
+          </a:p>
+        </p:txBody>
+      </p:sp>
+      <p:pic>
+        <p:nvPicPr>
+          <p:cNvPr id="11" name="Emoji 11" descr="emoji"/>
+          <p:cNvPicPr>
+            <a:picLocks noChangeAspect="1"/>
+          </p:cNvPicPr>
+          <p:nvPr/>
+        </p:nvPicPr>
+        <p:blipFill>
+          <a:blip r:embed="rId3"/>
+          <a:stretch>
+            <a:fillRect/>
+          </a:stretch>
+        </p:blipFill>
+        <p:spPr>
+          <a:xfrm>
+            <a:off x="1873958" y="311150"/>
+            <a:ext cx="292100" cy="292100"/>
+          </a:xfrm>
+          <a:prstGeom prst="rect">
+            <a:avLst/>
+          </a:prstGeom>
+        </p:spPr>
+      </p:pic>
+      <p:sp>
+        <p:nvSpPr>
+          <p:cNvPr id="4" name="Text 2"/>
+          <p:cNvSpPr/>
+          <p:nvPr/>
+        </p:nvSpPr>
+        <p:spPr>
+          <a:xfrm>
+            <a:off x="3566160" y="1051560"/>
+            <a:ext cx="2011680" cy="1463040"/>
+          </a:xfrm>
+          <a:prstGeom prst="rect">
+            <a:avLst/>
+          </a:prstGeom>
+          <a:noFill/>
+          <a:ln/>
+        </p:spPr>
+        <p:txBody>
+          <a:bodyPr wrap="square" rtlCol="0" anchor="ctr"/>
+          <a:lstStyle/>
+          <a:p>
+            <a:pPr marL="0" indent="0" algn="ctr">
+              <a:buNone/>
+            </a:pPr>
+            <a:r>
+              <a:rPr lang="en-US" sz="7000" dirty="0">
+                <a:solidFill>
+                  <a:srgbClr val="000000"/>
+                </a:solidFill>
+              </a:rPr>
+              <a:t>    </a:t>
+            </a:r>
+            <a:endParaRPr lang="en-US" sz="7000" dirty="0"/>
+          </a:p>
+        </p:txBody>
+      </p:sp>
+      <p:pic>
+        <p:nvPicPr>
+          <p:cNvPr id="12" name="Emoji 12" descr="emoji"/>
+          <p:cNvPicPr>
+            <a:picLocks noChangeAspect="1"/>
+          </p:cNvPicPr>
+          <p:nvPr/>
+        </p:nvPicPr>
+        <p:blipFill>
+          <a:blip r:embed="rId4"/>
+          <a:stretch>
+            <a:fillRect/>
+          </a:stretch>
+        </p:blipFill>
+        <p:spPr>
+          <a:xfrm>
+            <a:off x="4127500" y="1338580"/>
+            <a:ext cx="889000" cy="889000"/>
+          </a:xfrm>
+          <a:prstGeom prst="rect">
+            <a:avLst/>
+          </a:prstGeom>
+        </p:spPr>
+      </p:pic>
+      <p:sp>
+        <p:nvSpPr>
+          <p:cNvPr id="5" name="Shape 3"/>
+          <p:cNvSpPr/>
+          <p:nvPr/>
+        </p:nvSpPr>
+        <p:spPr>
+          <a:xfrm>
+            <a:off x="817510" y="2628901"/>
+            <a:ext cx="7315200" cy="731520"/>
+          </a:xfrm>
+          <a:prstGeom prst="roundRect">
+            <a:avLst>
+              <a:gd name="adj" fmla="val 18750"/>
+            </a:avLst>
+          </a:prstGeom>
+          <a:solidFill>
+            <a:srgbClr val="7C3AED"/>
+          </a:solidFill>
+          <a:ln/>
+          <a:effectLst>
+            <a:outerShdw blurRad="101600" dist="38100" dir="2700000" algn="bl" rotWithShape="0">
+              <a:srgbClr val="000000">
+                <a:alpha val="15000"/>
+              </a:srgbClr>
+            </a:outerShdw>
+          </a:effectLst>
+        </p:spPr>
+      </p:sp>
+      <p:sp>
+        <p:nvSpPr>
+          <p:cNvPr id="6" name="Text 4"/>
+          <p:cNvSpPr/>
+          <p:nvPr/>
+        </p:nvSpPr>
+        <p:spPr>
+          <a:xfrm>
+            <a:off x="914400" y="2651760"/>
+            <a:ext cx="7315200" cy="731520"/>
+          </a:xfrm>
+          <a:prstGeom prst="rect">
+            <a:avLst/>
+          </a:prstGeom>
+          <a:noFill/>
+          <a:ln/>
+        </p:spPr>
+        <p:txBody>
+          <a:bodyPr wrap="square" rtlCol="0" anchor="ctr"/>
+          <a:lstStyle/>
+          <a:p>
+            <a:pPr marL="0" indent="0" algn="ctr">
+              <a:buNone/>
+            </a:pPr>
+            <a:r>
+              <a:rPr lang="en-US" sz="2600" b="1" dirty="0">
+                <a:solidFill>
+                  <a:srgbClr val="FFFFFF"/>
+                </a:solidFill>
+                <a:latin typeface="Arial" pitchFamily="34" charset="0"/>
+                <a:ea typeface="Arial" pitchFamily="34" charset="-122"/>
+                <a:cs typeface="Arial" pitchFamily="34" charset="-120"/>
+              </a:rPr>
+              <a:t>      İyi ki doğdun!</a:t>
+            </a:r>
+            <a:endParaRPr lang="en-US" sz="2600" dirty="0"/>
+          </a:p>
+        </p:txBody>
+      </p:sp>
+      <p:pic>
+        <p:nvPicPr>
+          <p:cNvPr id="13" name="Emoji 13" descr="emoji"/>
+          <p:cNvPicPr>
+            <a:picLocks noChangeAspect="1"/>
+          </p:cNvPicPr>
+          <p:nvPr/>
+        </p:nvPicPr>
+        <p:blipFill>
+          <a:blip r:embed="rId5"/>
+          <a:stretch>
+            <a:fillRect/>
+          </a:stretch>
+        </p:blipFill>
+        <p:spPr>
+          <a:xfrm>
+            <a:off x="3242088" y="2852420"/>
+            <a:ext cx="330200" cy="330200"/>
+          </a:xfrm>
+          <a:prstGeom prst="rect">
+            <a:avLst/>
+          </a:prstGeom>
+        </p:spPr>
+      </p:pic>
+      <p:sp>
+        <p:nvSpPr>
+          <p:cNvPr id="7" name="Shape 5"/>
+          <p:cNvSpPr/>
+          <p:nvPr/>
+        </p:nvSpPr>
+        <p:spPr>
+          <a:xfrm>
+            <a:off x="3017520" y="3520440"/>
+            <a:ext cx="3108960" cy="502920"/>
+          </a:xfrm>
+          <a:prstGeom prst="roundRect">
+            <a:avLst>
+              <a:gd name="adj" fmla="val 49091"/>
+            </a:avLst>
+          </a:prstGeom>
+          <a:solidFill>
+            <a:srgbClr val="DC2626"/>
+          </a:solidFill>
+          <a:ln/>
+          <a:effectLst>
+            <a:outerShdw blurRad="101600" dist="38100" dir="2700000" algn="bl" rotWithShape="0">
+              <a:srgbClr val="000000">
+                <a:alpha val="15000"/>
+              </a:srgbClr>
+            </a:outerShdw>
+          </a:effectLst>
+        </p:spPr>
+      </p:sp>
+      <p:sp>
+        <p:nvSpPr>
+          <p:cNvPr id="8" name="Text 6"/>
+          <p:cNvSpPr/>
+          <p:nvPr/>
+        </p:nvSpPr>
+        <p:spPr>
+          <a:xfrm>
+            <a:off x="3017520" y="3520440"/>
+            <a:ext cx="3108960" cy="502920"/>
+          </a:xfrm>
+          <a:prstGeom prst="rect">
+            <a:avLst/>
+          </a:prstGeom>
+          <a:noFill/>
+          <a:ln/>
+        </p:spPr>
+        <p:txBody>
+          <a:bodyPr wrap="square" rtlCol="0" anchor="ctr"/>
+          <a:lstStyle/>
+          <a:p>
+            <a:pPr marL="0" indent="0" algn="ctr">
+              <a:buNone/>
+            </a:pPr>
+            <a:r>
+              <a:rPr lang="en-US" sz="1400" b="1" dirty="0">
+                <a:solidFill>
+                  <a:srgbClr val="FFFFFF"/>
+                </a:solidFill>
+                <a:latin typeface="Arial" pitchFamily="34" charset="0"/>
+                <a:ea typeface="Arial" pitchFamily="34" charset="-122"/>
+                <a:cs typeface="Arial" pitchFamily="34" charset="-120"/>
+              </a:rPr>
+              <a:t>      Sen de Söyle!</a:t>
+            </a:r>
+            <a:endParaRPr lang="en-US" sz="1400" dirty="0"/>
+          </a:p>
+        </p:txBody>
+      </p:sp>
+      <p:pic>
+        <p:nvPicPr>
+          <p:cNvPr id="14" name="Emoji 14" descr="emoji"/>
+          <p:cNvPicPr>
+            <a:picLocks noChangeAspect="1"/>
+          </p:cNvPicPr>
+          <p:nvPr/>
+        </p:nvPicPr>
+        <p:blipFill>
+          <a:blip r:embed="rId6"/>
+          <a:stretch>
+            <a:fillRect/>
+          </a:stretch>
+        </p:blipFill>
+        <p:spPr>
+          <a:xfrm>
+            <a:off x="3850726" y="3683000"/>
+            <a:ext cx="177800" cy="177800"/>
+          </a:xfrm>
+          <a:prstGeom prst="rect">
+            <a:avLst/>
+          </a:prstGeom>
+        </p:spPr>
+      </p:pic>
+      <p:sp>
+        <p:nvSpPr>
+          <p:cNvPr id="9" name="Shape 7"/>
+          <p:cNvSpPr/>
+          <p:nvPr/>
+        </p:nvSpPr>
+        <p:spPr>
+          <a:xfrm>
+            <a:off x="1371600" y="4206240"/>
+            <a:ext cx="6400800" cy="731520"/>
+          </a:xfrm>
+          <a:prstGeom prst="roundRect">
+            <a:avLst>
+              <a:gd name="adj" fmla="val 18750"/>
+            </a:avLst>
+          </a:prstGeom>
+          <a:solidFill>
+            <a:srgbClr val="FFFFFF"/>
+          </a:solidFill>
+          <a:ln/>
+          <a:effectLst>
+            <a:outerShdw blurRad="101600" dist="38100" dir="2700000" algn="bl" rotWithShape="0">
+              <a:srgbClr val="000000">
+                <a:alpha val="15000"/>
+              </a:srgbClr>
+            </a:outerShdw>
+          </a:effectLst>
+        </p:spPr>
+      </p:sp>
+      <p:sp>
+        <p:nvSpPr>
+          <p:cNvPr id="10" name="Text 8"/>
+          <p:cNvSpPr/>
+          <p:nvPr/>
+        </p:nvSpPr>
+        <p:spPr>
+          <a:xfrm>
+            <a:off x="1463040" y="4251960"/>
+            <a:ext cx="6217920" cy="640080"/>
+          </a:xfrm>
+          <a:prstGeom prst="rect">
+            <a:avLst/>
+          </a:prstGeom>
+          <a:noFill/>
+          <a:ln/>
+        </p:spPr>
+        <p:txBody>
+          <a:bodyPr wrap="square" rtlCol="0" anchor="ctr"/>
+          <a:lstStyle/>
+          <a:p>
+            <a:pPr marL="0" indent="0" algn="ctr">
+              <a:buNone/>
+            </a:pPr>
+            <a:r>
+              <a:rPr lang="en-US" sz="1400" b="1" dirty="0">
+                <a:solidFill>
+                  <a:srgbClr val="7C3AED"/>
+                </a:solidFill>
+                <a:latin typeface="Arial" pitchFamily="34" charset="0"/>
+                <a:ea typeface="Arial" pitchFamily="34" charset="-122"/>
+                <a:cs typeface="Arial" pitchFamily="34" charset="-120"/>
+              </a:rPr>
+              <a:t>      Peki ben kaç yaşındayım? Hadi mumları sayalım!</a:t>
+            </a:r>
+            <a:endParaRPr lang="en-US" sz="1400" dirty="0"/>
+          </a:p>
+        </p:txBody>
+      </p:sp>
+      <p:pic>
+        <p:nvPicPr>
+          <p:cNvPr id="15" name="Emoji 15" descr="emoji"/>
+          <p:cNvPicPr>
+            <a:picLocks noChangeAspect="1"/>
+          </p:cNvPicPr>
+          <p:nvPr/>
+        </p:nvPicPr>
+        <p:blipFill>
+          <a:blip r:embed="rId7"/>
+          <a:stretch>
+            <a:fillRect/>
+          </a:stretch>
+        </p:blipFill>
+        <p:spPr>
+          <a:xfrm>
+            <a:off x="2363387" y="4483100"/>
+            <a:ext cx="177800" cy="177800"/>
+          </a:xfrm>
+          <a:prstGeom prst="rect">
+            <a:avLst/>
+          </a:prstGeom>
+        </p:spPr>
+      </p:pic>
+    </p:spTree>
+  </p:cSld>
+  <p:clrMapOvr>
+    <a:masterClrMapping/>
+  </p:clrMapOvr>
+  <p:timing>
+    <p:tnLst>
+      <p:par>
+        <p:cTn id="1" dur="indefinite" restart="never" nodeType="tmRoot">
+          <p:childTnLst>
+            <p:seq concurrent="1" nextAc="seek">
+              <p:cTn id="2" dur="indefinite" nodeType="mainSeq">
+                <p:childTnLst>
+                  <p:par>
+                    <p:cTn id="3" fill="hold">
+                      <p:stCondLst>
+                        <p:cond delay="indefinite"/>
+                      </p:stCondLst>
+                      <p:childTnLst>
+                        <p:par>
+                          <p:cTn id="4" fill="hold">
+                            <p:stCondLst>
+                              <p:cond delay="0"/>
+                            </p:stCondLst>
+                            <p:childTnLst>
+                              <p:par>
+                                <p:cTn id="5" presetID="1" presetClass="entr" presetSubtype="0" fill="hold" grpId="0" nodeType="clickEffect">
+                                  <p:stCondLst>
+                                    <p:cond delay="0"/>
+                                  </p:stCondLst>
+                                  <p:childTnLst>
+                                    <p:set>
+                                      <p:cBhvr>
+                                        <p:cTn id="6" dur="1" fill="hold">
+                                          <p:stCondLst>
+                                            <p:cond delay="0"/>
+                                          </p:stCondLst>
+                                        </p:cTn>
+                                        <p:tgtEl>
+                                          <p:spTgt spid="4"/>
+                                        </p:tgtEl>
+                                        <p:attrNameLst>
+                                          <p:attrName>style.visibility</p:attrName>
+                                        </p:attrNameLst>
+                                      </p:cBhvr>
+                                      <p:to>
+                                        <p:strVal val="visible"/>
+                                      </p:to>
+                                    </p:set>
+                                  </p:childTnLst>
+                                </p:cTn>
+                              </p:par>
+                            </p:childTnLst>
+                          </p:cTn>
+                        </p:par>
+                      </p:childTnLst>
+                    </p:cTn>
+                  </p:par>
+                  <p:par>
+                    <p:cTn id="7" fill="hold">
+                      <p:stCondLst>
+                        <p:cond delay="indefinite"/>
+                      </p:stCondLst>
+                      <p:childTnLst>
+                        <p:par>
+                          <p:cTn id="8" fill="hold">
+                            <p:stCondLst>
+                              <p:cond delay="0"/>
+                            </p:stCondLst>
+                            <p:childTnLst>
+                              <p:par>
+                                <p:cTn id="9" presetID="1" presetClass="entr" presetSubtype="0" fill="hold" nodeType="clickEffect">
+                                  <p:stCondLst>
+                                    <p:cond delay="0"/>
+                                  </p:stCondLst>
+                                  <p:childTnLst>
+                                    <p:set>
+                                      <p:cBhvr>
+                                        <p:cTn id="10" dur="1" fill="hold">
+                                          <p:stCondLst>
+                                            <p:cond delay="0"/>
+                                          </p:stCondLst>
+                                        </p:cTn>
+                                        <p:tgtEl>
+                                          <p:spTgt spid="5"/>
+                                        </p:tgtEl>
+                                        <p:attrNameLst>
+                                          <p:attrName>style.visibility</p:attrName>
+                                        </p:attrNameLst>
+                                      </p:cBhvr>
+                                      <p:to>
+                                        <p:strVal val="visible"/>
+                                      </p:to>
+                                    </p:set>
+                                  </p:childTnLst>
+                                </p:cTn>
+                              </p:par>
+                              <p:par>
+                                <p:cTn id="11" presetID="1" presetClass="entr" presetSubtype="0" fill="hold" grpId="0" nodeType="withEffect">
+                                  <p:stCondLst>
+                                    <p:cond delay="0"/>
+                                  </p:stCondLst>
+                                  <p:childTnLst>
+                                    <p:set>
+                                      <p:cBhvr>
+                                        <p:cTn id="12" dur="1" fill="hold">
+                                          <p:stCondLst>
+                                            <p:cond delay="0"/>
+                                          </p:stCondLst>
+                                        </p:cTn>
+                                        <p:tgtEl>
+                                          <p:spTgt spid="6"/>
+                                        </p:tgtEl>
+                                        <p:attrNameLst>
+                                          <p:attrName>style.visibility</p:attrName>
+                                        </p:attrNameLst>
+                                      </p:cBhvr>
+                                      <p:to>
+                                        <p:strVal val="visible"/>
+                                      </p:to>
+                                    </p:set>
+                                  </p:childTnLst>
+                                </p:cTn>
+                              </p:par>
+                            </p:childTnLst>
+                          </p:cTn>
+                        </p:par>
+                      </p:childTnLst>
+                    </p:cTn>
+                  </p:par>
+                  <p:par>
+                    <p:cTn id="13" fill="hold">
+                      <p:stCondLst>
+                        <p:cond delay="indefinite"/>
+                      </p:stCondLst>
+                      <p:childTnLst>
+                        <p:par>
+                          <p:cTn id="14" fill="hold">
+                            <p:stCondLst>
+                              <p:cond delay="0"/>
+                            </p:stCondLst>
+                            <p:childTnLst>
+                              <p:par>
+                                <p:cTn id="15" presetID="1" presetClass="entr" presetSubtype="0" fill="hold" nodeType="clickEffect">
+                                  <p:stCondLst>
+                                    <p:cond delay="0"/>
+                                  </p:stCondLst>
+                                  <p:childTnLst>
+                                    <p:set>
+                                      <p:cBhvr>
+                                        <p:cTn id="16" dur="1" fill="hold">
+                                          <p:stCondLst>
+                                            <p:cond delay="0"/>
+                                          </p:stCondLst>
+                                        </p:cTn>
+                                        <p:tgtEl>
+                                          <p:spTgt spid="7"/>
+                                        </p:tgtEl>
+                                        <p:attrNameLst>
+                                          <p:attrName>style.visibility</p:attrName>
+                                        </p:attrNameLst>
+                                      </p:cBhvr>
+                                      <p:to>
+                                        <p:strVal val="visible"/>
+                                      </p:to>
+                                    </p:set>
+                                  </p:childTnLst>
+                                </p:cTn>
+                              </p:par>
+                              <p:par>
+                                <p:cTn id="17" presetID="1" presetClass="entr" presetSubtype="0" fill="hold" grpId="0" nodeType="withEffect">
+                                  <p:stCondLst>
+                                    <p:cond delay="0"/>
+                                  </p:stCondLst>
+                                  <p:childTnLst>
+                                    <p:set>
+                                      <p:cBhvr>
+                                        <p:cTn id="18" dur="1" fill="hold">
+                                          <p:stCondLst>
+                                            <p:cond delay="0"/>
+                                          </p:stCondLst>
+                                        </p:cTn>
+                                        <p:tgtEl>
+                                          <p:spTgt spid="8"/>
+                                        </p:tgtEl>
+                                        <p:attrNameLst>
+                                          <p:attrName>style.visibility</p:attrName>
+                                        </p:attrNameLst>
+                                      </p:cBhvr>
+                                      <p:to>
+                                        <p:strVal val="visible"/>
+                                      </p:to>
+                                    </p:set>
+                                  </p:childTnLst>
+                                </p:cTn>
+                              </p:par>
+                            </p:childTnLst>
+                          </p:cTn>
+                        </p:par>
+                      </p:childTnLst>
+                    </p:cTn>
+                  </p:par>
+                  <p:par>
+                    <p:cTn id="19" fill="hold">
+                      <p:stCondLst>
+                        <p:cond delay="indefinite"/>
+                      </p:stCondLst>
+                      <p:childTnLst>
+                        <p:par>
+                          <p:cTn id="20" fill="hold">
+                            <p:stCondLst>
+                              <p:cond delay="0"/>
+                            </p:stCondLst>
+                            <p:childTnLst>
+                              <p:par>
+                                <p:cTn id="21" presetID="1" presetClass="entr" presetSubtype="0" fill="hold" nodeType="clickEffect">
+                                  <p:stCondLst>
+                                    <p:cond delay="0"/>
+                                  </p:stCondLst>
+                                  <p:childTnLst>
+                                    <p:set>
+                                      <p:cBhvr>
+                                        <p:cTn id="22" dur="1" fill="hold">
+                                          <p:stCondLst>
+                                            <p:cond delay="0"/>
+                                          </p:stCondLst>
+                                        </p:cTn>
+                                        <p:tgtEl>
+                                          <p:spTgt spid="9"/>
+                                        </p:tgtEl>
+                                        <p:attrNameLst>
+                                          <p:attrName>style.visibility</p:attrName>
+                                        </p:attrNameLst>
+                                      </p:cBhvr>
+                                      <p:to>
+                                        <p:strVal val="visible"/>
+                                      </p:to>
+                                    </p:set>
+                                  </p:childTnLst>
+                                </p:cTn>
+                              </p:par>
+                              <p:par>
+                                <p:cTn id="23" presetID="1" presetClass="entr" presetSubtype="0" fill="hold" grpId="0" nodeType="withEffect">
+                                  <p:stCondLst>
+                                    <p:cond delay="0"/>
+                                  </p:stCondLst>
+                                  <p:childTnLst>
+                                    <p:set>
+                                      <p:cBhvr>
+                                        <p:cTn id="24" dur="1" fill="hold">
+                                          <p:stCondLst>
+                                            <p:cond delay="0"/>
+                                          </p:stCondLst>
+                                        </p:cTn>
+                                        <p:tgtEl>
+                                          <p:spTgt spid="10"/>
+                                        </p:tgtEl>
+                                        <p:attrNameLst>
+                                          <p:attrName>style.visibility</p:attrName>
+                                        </p:attrNameLst>
+                                      </p:cBhvr>
+                                      <p:to>
+                                        <p:strVal val="visible"/>
+                                      </p:to>
+                                    </p:set>
+                                  </p:childTnLst>
+                                </p:cTn>
+                              </p:par>
+                            </p:childTnLst>
+                          </p:cTn>
+                        </p:par>
+                      </p:childTnLst>
+                    </p:cTn>
+                  </p:par>
+                </p:childTnLst>
+              </p:cTn>
+              <p:prevCondLst>
+                <p:cond evt="onPrev" delay="0">
+                  <p:tgtEl>
+                    <p:sldTgt/>
+                  </p:tgtEl>
+                </p:cond>
+              </p:prevCondLst>
+              <p:nextCondLst>
+                <p:cond evt="onNext" delay="0">
+                  <p:tgtEl>
+                    <p:sldTgt/>
+                  </p:tgtEl>
+                </p:cond>
+              </p:nextCondLst>
+            </p:seq>
+          </p:childTnLst>
+        </p:cTn>
+      </p:par>
+    </p:tnLst>
+    <p:bldLst>
+      <p:bldP spid="4" grpId="0" animBg="1"/>
+      <p:bldP spid="6" grpId="0" animBg="1"/>
+      <p:bldP spid="8" grpId="0" animBg="1"/>
+      <p:bldP spid="10" grpId="0" animBg="1"/>
+    </p:bldLst>
+  </p:timing>
+</p:sld>
+</file>
+
+<file path=ppt/slides/slide4.xml><?xml version="1.0" encoding="utf-8"?>
+<p:sld xmlns:a="http://schemas.openxmlformats.org/drawingml/2006/main" xmlns:r="http://schemas.openxmlformats.org/officeDocument/2006/relationships" xmlns:p="http://schemas.openxmlformats.org/presentationml/2006/main">
   <p:cSld name="Slide 3">
     <p:bg>
       <p:bgPr>
@@ -5343,7 +6749,7 @@
                 <a:ea typeface="Arial" pitchFamily="34" charset="-122"/>
                 <a:cs typeface="Arial" pitchFamily="34" charset="-120"/>
               </a:rPr>
-              <a:t xml:space="preserve">      MUMLARI SAY: 1-10</a:t>
+              <a:t>      MUMLARI SAY: 1-10</a:t>
             </a:r>
             <a:endParaRPr lang="en-US" sz="2600" dirty="0"/>
           </a:p>
@@ -5358,7 +6764,7 @@
           <p:nvPr/>
         </p:nvPicPr>
         <p:blipFill>
-          <a:blip r:embed="rId100"/>
+          <a:blip r:embed="rId3"/>
           <a:stretch>
             <a:fillRect/>
           </a:stretch>
@@ -5432,7 +6838,7 @@
                   <a:srgbClr val="000000"/>
                 </a:solidFill>
               </a:rPr>
-              <a:t xml:space="preserve">    </a:t>
+              <a:t>    </a:t>
             </a:r>
             <a:endParaRPr lang="en-US" sz="1800" dirty="0"/>
           </a:p>
@@ -5447,7 +6853,7 @@
           <p:nvPr/>
         </p:nvPicPr>
         <p:blipFill>
-          <a:blip r:embed="rId100"/>
+          <a:blip r:embed="rId3"/>
           <a:stretch>
             <a:fillRect/>
           </a:stretch>
@@ -5599,7 +7005,7 @@
                   <a:srgbClr val="000000"/>
                 </a:solidFill>
               </a:rPr>
-              <a:t xml:space="preserve">    </a:t>
+              <a:t>    </a:t>
             </a:r>
             <a:endParaRPr lang="en-US" sz="1800" dirty="0"/>
           </a:p>
@@ -5614,7 +7020,7 @@
           <p:nvPr/>
         </p:nvPicPr>
         <p:blipFill>
-          <a:blip r:embed="rId100"/>
+          <a:blip r:embed="rId3"/>
           <a:stretch>
             <a:fillRect/>
           </a:stretch>
@@ -5766,7 +7172,7 @@
                   <a:srgbClr val="000000"/>
                 </a:solidFill>
               </a:rPr>
-              <a:t xml:space="preserve">    </a:t>
+              <a:t>    </a:t>
             </a:r>
             <a:endParaRPr lang="en-US" sz="1800" dirty="0"/>
           </a:p>
@@ -5781,7 +7187,7 @@
           <p:nvPr/>
         </p:nvPicPr>
         <p:blipFill>
-          <a:blip r:embed="rId100"/>
+          <a:blip r:embed="rId3"/>
           <a:stretch>
             <a:fillRect/>
           </a:stretch>
@@ -5933,7 +7339,7 @@
                   <a:srgbClr val="000000"/>
                 </a:solidFill>
               </a:rPr>
-              <a:t xml:space="preserve">    </a:t>
+              <a:t>    </a:t>
             </a:r>
             <a:endParaRPr lang="en-US" sz="1800" dirty="0"/>
           </a:p>
@@ -5948,7 +7354,7 @@
           <p:nvPr/>
         </p:nvPicPr>
         <p:blipFill>
-          <a:blip r:embed="rId100"/>
+          <a:blip r:embed="rId3"/>
           <a:stretch>
             <a:fillRect/>
           </a:stretch>
@@ -6100,7 +7506,7 @@
                   <a:srgbClr val="000000"/>
                 </a:solidFill>
               </a:rPr>
-              <a:t xml:space="preserve">    </a:t>
+              <a:t>    </a:t>
             </a:r>
             <a:endParaRPr lang="en-US" sz="1800" dirty="0"/>
           </a:p>
@@ -6115,7 +7521,7 @@
           <p:nvPr/>
         </p:nvPicPr>
         <p:blipFill>
-          <a:blip r:embed="rId100"/>
+          <a:blip r:embed="rId3"/>
           <a:stretch>
             <a:fillRect/>
           </a:stretch>
@@ -6267,7 +7673,7 @@
                   <a:srgbClr val="000000"/>
                 </a:solidFill>
               </a:rPr>
-              <a:t xml:space="preserve">    </a:t>
+              <a:t>    </a:t>
             </a:r>
             <a:endParaRPr lang="en-US" sz="1800" dirty="0"/>
           </a:p>
@@ -6282,7 +7688,7 @@
           <p:nvPr/>
         </p:nvPicPr>
         <p:blipFill>
-          <a:blip r:embed="rId100"/>
+          <a:blip r:embed="rId3"/>
           <a:stretch>
             <a:fillRect/>
           </a:stretch>
@@ -6434,7 +7840,7 @@
                   <a:srgbClr val="000000"/>
                 </a:solidFill>
               </a:rPr>
-              <a:t xml:space="preserve">    </a:t>
+              <a:t>    </a:t>
             </a:r>
             <a:endParaRPr lang="en-US" sz="1800" dirty="0"/>
           </a:p>
@@ -6449,7 +7855,7 @@
           <p:nvPr/>
         </p:nvPicPr>
         <p:blipFill>
-          <a:blip r:embed="rId100"/>
+          <a:blip r:embed="rId3"/>
           <a:stretch>
             <a:fillRect/>
           </a:stretch>
@@ -6601,7 +8007,7 @@
                   <a:srgbClr val="000000"/>
                 </a:solidFill>
               </a:rPr>
-              <a:t xml:space="preserve">    </a:t>
+              <a:t>    </a:t>
             </a:r>
             <a:endParaRPr lang="en-US" sz="1800" dirty="0"/>
           </a:p>
@@ -6616,7 +8022,7 @@
           <p:nvPr/>
         </p:nvPicPr>
         <p:blipFill>
-          <a:blip r:embed="rId100"/>
+          <a:blip r:embed="rId3"/>
           <a:stretch>
             <a:fillRect/>
           </a:stretch>
@@ -6768,7 +8174,7 @@
                   <a:srgbClr val="000000"/>
                 </a:solidFill>
               </a:rPr>
-              <a:t xml:space="preserve">    </a:t>
+              <a:t>    </a:t>
             </a:r>
             <a:endParaRPr lang="en-US" sz="1800" dirty="0"/>
           </a:p>
@@ -6783,7 +8189,7 @@
           <p:nvPr/>
         </p:nvPicPr>
         <p:blipFill>
-          <a:blip r:embed="rId100"/>
+          <a:blip r:embed="rId3"/>
           <a:stretch>
             <a:fillRect/>
           </a:stretch>
@@ -6935,7 +8341,7 @@
                   <a:srgbClr val="000000"/>
                 </a:solidFill>
               </a:rPr>
-              <a:t xml:space="preserve">    </a:t>
+              <a:t>    </a:t>
             </a:r>
             <a:endParaRPr lang="en-US" sz="1800" dirty="0"/>
           </a:p>
@@ -6950,7 +8356,7 @@
           <p:nvPr/>
         </p:nvPicPr>
         <p:blipFill>
-          <a:blip r:embed="rId100"/>
+          <a:blip r:embed="rId3"/>
           <a:stretch>
             <a:fillRect/>
           </a:stretch>
@@ -7105,7 +8511,7 @@
                 <a:ea typeface="Arial" pitchFamily="34" charset="-122"/>
                 <a:cs typeface="Arial" pitchFamily="34" charset="-120"/>
               </a:rPr>
-              <a:t xml:space="preserve">      Sayarak Tekrar Et!</a:t>
+              <a:t>      Sayarak Tekrar Et!</a:t>
             </a:r>
             <a:endParaRPr lang="en-US" sz="1400" dirty="0"/>
           </a:p>
@@ -7120,7 +8526,7 @@
           <p:nvPr/>
         </p:nvPicPr>
         <p:blipFill>
-          <a:blip r:embed="rId101"/>
+          <a:blip r:embed="rId4"/>
           <a:stretch>
             <a:fillRect/>
           </a:stretch>
@@ -8511,7 +9917,7 @@
 </p:sld>
 </file>
 
-<file path=ppt/slides/slide4.xml><?xml version="1.0" encoding="utf-8"?>
+<file path=ppt/slides/slide5.xml><?xml version="1.0" encoding="utf-8"?>
 <p:sld xmlns:a="http://schemas.openxmlformats.org/drawingml/2006/main" xmlns:r="http://schemas.openxmlformats.org/officeDocument/2006/relationships" xmlns:p="http://schemas.openxmlformats.org/presentationml/2006/main">
   <p:cSld name="Slide 4">
     <p:bg>
@@ -8589,7 +9995,7 @@
                 <a:ea typeface="Arial" pitchFamily="34" charset="-122"/>
                 <a:cs typeface="Arial" pitchFamily="34" charset="-120"/>
               </a:rPr>
-              <a:t xml:space="preserve">      SAYILAR: 11-20</a:t>
+              <a:t>      SAYILAR: 11-20</a:t>
             </a:r>
             <a:endParaRPr lang="en-US" sz="2600" dirty="0"/>
           </a:p>
@@ -8604,7 +10010,7 @@
           <p:nvPr/>
         </p:nvPicPr>
         <p:blipFill>
-          <a:blip r:embed="rId100"/>
+          <a:blip r:embed="rId3"/>
           <a:stretch>
             <a:fillRect/>
           </a:stretch>
@@ -9751,7 +11157,7 @@
                 <a:ea typeface="Arial" pitchFamily="34" charset="-122"/>
                 <a:cs typeface="Arial" pitchFamily="34" charset="-120"/>
               </a:rPr>
-              <a:t xml:space="preserve">      Biraz Zorlaşıyor!</a:t>
+              <a:t>      Biraz Zorlaşıyor!</a:t>
             </a:r>
             <a:endParaRPr lang="en-US" sz="1400" dirty="0"/>
           </a:p>
@@ -9766,7 +11172,7 @@
           <p:nvPr/>
         </p:nvPicPr>
         <p:blipFill>
-          <a:blip r:embed="rId101"/>
+          <a:blip r:embed="rId4"/>
           <a:stretch>
             <a:fillRect/>
           </a:stretch>
@@ -10904,7 +12310,7 @@
 </p:sld>
 </file>
 
-<file path=ppt/slides/slide5.xml><?xml version="1.0" encoding="utf-8"?>
+<file path=ppt/slides/slide6.xml><?xml version="1.0" encoding="utf-8"?>
 <p:sld xmlns:a="http://schemas.openxmlformats.org/drawingml/2006/main" xmlns:r="http://schemas.openxmlformats.org/officeDocument/2006/relationships" xmlns:p="http://schemas.openxmlformats.org/presentationml/2006/main">
   <p:cSld name="Slide 5">
     <p:bg>
@@ -10982,7 +12388,7 @@
                 <a:ea typeface="Arial" pitchFamily="34" charset="-122"/>
                 <a:cs typeface="Arial" pitchFamily="34" charset="-120"/>
               </a:rPr>
-              <a:t xml:space="preserve">      YAŞINI SÖYLE</a:t>
+              <a:t>      YAŞINI SÖYLE</a:t>
             </a:r>
             <a:endParaRPr lang="en-US" sz="2600" dirty="0"/>
           </a:p>
@@ -10997,7 +12403,7 @@
           <p:nvPr/>
         </p:nvPicPr>
         <p:blipFill>
-          <a:blip r:embed="rId100"/>
+          <a:blip r:embed="rId3"/>
           <a:stretch>
             <a:fillRect/>
           </a:stretch>
@@ -11346,7 +12752,7 @@
                 <a:ea typeface="Arial" pitchFamily="34" charset="-122"/>
                 <a:cs typeface="Arial" pitchFamily="34" charset="-120"/>
               </a:rPr>
-              <a:t xml:space="preserve">      Sırayla Söyle!</a:t>
+              <a:t>      Sırayla Söyle!</a:t>
             </a:r>
             <a:endParaRPr lang="en-US" sz="1400" dirty="0"/>
           </a:p>
@@ -11361,7 +12767,7 @@
           <p:nvPr/>
         </p:nvPicPr>
         <p:blipFill>
-          <a:blip r:embed="rId101"/>
+          <a:blip r:embed="rId4"/>
           <a:stretch>
             <a:fillRect/>
           </a:stretch>
@@ -11438,7 +12844,7 @@
                 <a:ea typeface="Arial" pitchFamily="34" charset="-122"/>
                 <a:cs typeface="Arial" pitchFamily="34" charset="-120"/>
               </a:rPr>
-              <a:t xml:space="preserve">      Şimdi sen söyle: 'Ben... [yaşın]... yaşındayım!'</a:t>
+              <a:t>      Şimdi sen söyle: 'Ben... [yaşın]... yaşındayım!'</a:t>
             </a:r>
             <a:endParaRPr lang="en-US" sz="1500" dirty="0"/>
           </a:p>
@@ -11453,7 +12859,7 @@
           <p:nvPr/>
         </p:nvPicPr>
         <p:blipFill>
-          <a:blip r:embed="rId102"/>
+          <a:blip r:embed="rId5"/>
           <a:stretch>
             <a:fillRect/>
           </a:stretch>
@@ -11962,7 +13368,7 @@
 </p:sld>
 </file>
 
-<file path=ppt/slides/slide6.xml><?xml version="1.0" encoding="utf-8"?>
+<file path=ppt/slides/slide7.xml><?xml version="1.0" encoding="utf-8"?>
 <p:sld xmlns:a="http://schemas.openxmlformats.org/drawingml/2006/main" xmlns:r="http://schemas.openxmlformats.org/officeDocument/2006/relationships" xmlns:p="http://schemas.openxmlformats.org/presentationml/2006/main">
   <p:cSld name="Slide 8">
     <p:bg>
@@ -12040,7 +13446,7 @@
                 <a:ea typeface="Arial" pitchFamily="34" charset="-122"/>
                 <a:cs typeface="Arial" pitchFamily="34" charset="-120"/>
               </a:rPr>
-              <a:t xml:space="preserve">      DEDEKTİF ZAMANI!</a:t>
+              <a:t>      DEDEKTİF ZAMANI!</a:t>
             </a:r>
             <a:endParaRPr lang="en-US" sz="2800" dirty="0"/>
           </a:p>
@@ -12055,7 +13461,7 @@
           <p:nvPr/>
         </p:nvPicPr>
         <p:blipFill>
-          <a:blip r:embed="rId100"/>
+          <a:blip r:embed="rId3"/>
           <a:stretch>
             <a:fillRect/>
           </a:stretch>
@@ -12503,7 +13909,7 @@
                 <a:ea typeface="Arial" pitchFamily="34" charset="-122"/>
                 <a:cs typeface="Arial" pitchFamily="34" charset="-120"/>
               </a:rPr>
-              <a:t xml:space="preserve">      Hemen Söyle!</a:t>
+              <a:t>      Hemen Söyle!</a:t>
             </a:r>
             <a:endParaRPr lang="en-US" sz="1400" dirty="0"/>
           </a:p>
@@ -12518,7 +13924,7 @@
           <p:nvPr/>
         </p:nvPicPr>
         <p:blipFill>
-          <a:blip r:embed="rId101"/>
+          <a:blip r:embed="rId4"/>
           <a:stretch>
             <a:fillRect/>
           </a:stretch>
@@ -13049,7 +14455,7 @@
 </p:sld>
 </file>
 
-<file path=ppt/slides/slide7.xml><?xml version="1.0" encoding="utf-8"?>
+<file path=ppt/slides/slide8.xml><?xml version="1.0" encoding="utf-8"?>
 <p:sld xmlns:a="http://schemas.openxmlformats.org/drawingml/2006/main" xmlns:r="http://schemas.openxmlformats.org/officeDocument/2006/relationships" xmlns:p="http://schemas.openxmlformats.org/presentationml/2006/main">
   <p:cSld name="Slide 6">
     <p:bg>
@@ -13127,7 +14533,7 @@
                 <a:ea typeface="Arial" pitchFamily="34" charset="-122"/>
                 <a:cs typeface="Arial" pitchFamily="34" charset="-120"/>
               </a:rPr>
-              <a:t xml:space="preserve">      ARKADAŞINA SOR</a:t>
+              <a:t>      ARKADAŞINA SOR</a:t>
             </a:r>
             <a:endParaRPr lang="en-US" sz="2800" dirty="0"/>
           </a:p>
@@ -13142,7 +14548,7 @@
           <p:nvPr/>
         </p:nvPicPr>
         <p:blipFill>
-          <a:blip r:embed="rId100"/>
+          <a:blip r:embed="rId3"/>
           <a:stretch>
             <a:fillRect/>
           </a:stretch>
@@ -13377,7 +14783,7 @@
                 <a:ea typeface="Arial" pitchFamily="34" charset="-122"/>
                 <a:cs typeface="Arial" pitchFamily="34" charset="-120"/>
               </a:rPr>
-              <a:t xml:space="preserve">      Tekrar Et!</a:t>
+              <a:t>      Tekrar Et!</a:t>
             </a:r>
             <a:endParaRPr lang="en-US" sz="1400" dirty="0"/>
           </a:p>
@@ -13392,7 +14798,7 @@
           <p:nvPr/>
         </p:nvPicPr>
         <p:blipFill>
-          <a:blip r:embed="rId101"/>
+          <a:blip r:embed="rId4"/>
           <a:stretch>
             <a:fillRect/>
           </a:stretch>
@@ -13462,7 +14868,7 @@
                 <a:ea typeface="Arial" pitchFamily="34" charset="-122"/>
                 <a:cs typeface="Arial" pitchFamily="34" charset="-120"/>
               </a:rPr>
-              <a:t xml:space="preserve">      Arkadaşına sorduğunda kullan!</a:t>
+              <a:t>      Arkadaşına sorduğunda kullan!</a:t>
             </a:r>
             <a:endParaRPr lang="en-US" sz="1400" dirty="0"/>
           </a:p>
@@ -13477,7 +14883,7 @@
           <p:nvPr/>
         </p:nvPicPr>
         <p:blipFill>
-          <a:blip r:embed="rId102"/>
+          <a:blip r:embed="rId5"/>
           <a:stretch>
             <a:fillRect/>
           </a:stretch>
@@ -13824,7 +15230,7 @@
 </p:sld>
 </file>
 
-<file path=ppt/slides/slide8.xml><?xml version="1.0" encoding="utf-8"?>
+<file path=ppt/slides/slide9.xml><?xml version="1.0" encoding="utf-8"?>
 <p:sld xmlns:a="http://schemas.openxmlformats.org/drawingml/2006/main" xmlns:r="http://schemas.openxmlformats.org/officeDocument/2006/relationships" xmlns:p="http://schemas.openxmlformats.org/presentationml/2006/main">
   <p:cSld name="Slide 7">
     <p:bg>
@@ -13902,7 +15308,7 @@
                 <a:ea typeface="Arial" pitchFamily="34" charset="-122"/>
                 <a:cs typeface="Arial" pitchFamily="34" charset="-120"/>
               </a:rPr>
-              <a:t xml:space="preserve">      DOĞUM GÜNÜ KUTLAMASI</a:t>
+              <a:t>      DOĞUM GÜNÜ KUTLAMASI</a:t>
             </a:r>
             <a:endParaRPr lang="en-US" sz="2500" dirty="0"/>
           </a:p>
@@ -13917,7 +15323,7 @@
           <p:nvPr/>
         </p:nvPicPr>
         <p:blipFill>
-          <a:blip r:embed="rId100"/>
+          <a:blip r:embed="rId3"/>
           <a:stretch>
             <a:fillRect/>
           </a:stretch>
@@ -13962,7 +15368,7 @@
                   <a:srgbClr val="000000"/>
                 </a:solidFill>
               </a:rPr>
-              <a:t xml:space="preserve">    </a:t>
+              <a:t>    </a:t>
             </a:r>
             <a:endParaRPr lang="en-US" sz="5000" dirty="0"/>
           </a:p>
@@ -13977,7 +15383,7 @@
           <p:nvPr/>
         </p:nvPicPr>
         <p:blipFill>
-          <a:blip r:embed="rId101"/>
+          <a:blip r:embed="rId4"/>
           <a:stretch>
             <a:fillRect/>
           </a:stretch>
@@ -14093,7 +15499,7 @@
                 <a:ea typeface="Arial" pitchFamily="34" charset="-122"/>
                 <a:cs typeface="Arial" pitchFamily="34" charset="-120"/>
               </a:rPr>
-              <a:t xml:space="preserve">      İyi ki doğdun!</a:t>
+              <a:t>      İyi ki doğdun!</a:t>
             </a:r>
             <a:endParaRPr lang="en-US" sz="2000" dirty="0"/>
           </a:p>
@@ -14108,7 +15514,7 @@
           <p:nvPr/>
         </p:nvPicPr>
         <p:blipFill>
-          <a:blip r:embed="rId102"/>
+          <a:blip r:embed="rId5"/>
           <a:stretch>
             <a:fillRect/>
           </a:stretch>
@@ -14185,7 +15591,7 @@
                 <a:ea typeface="Arial" pitchFamily="34" charset="-122"/>
                 <a:cs typeface="Arial" pitchFamily="34" charset="-120"/>
               </a:rPr>
-              <a:t xml:space="preserve">      Doğum günün kutlu olsun!</a:t>
+              <a:t>      Doğum günün kutlu olsun!</a:t>
             </a:r>
             <a:endParaRPr lang="en-US" sz="2000" dirty="0"/>
           </a:p>
@@ -14200,7 +15606,7 @@
           <p:nvPr/>
         </p:nvPicPr>
         <p:blipFill>
-          <a:blip r:embed="rId102"/>
+          <a:blip r:embed="rId5"/>
           <a:stretch>
             <a:fillRect/>
           </a:stretch>
@@ -14277,7 +15683,7 @@
                 <a:ea typeface="Arial" pitchFamily="34" charset="-122"/>
                 <a:cs typeface="Arial" pitchFamily="34" charset="-120"/>
               </a:rPr>
-              <a:t xml:space="preserve">      Tekrar Et!</a:t>
+              <a:t>      Tekrar Et!</a:t>
             </a:r>
             <a:endParaRPr lang="en-US" sz="1400" dirty="0"/>
           </a:p>
@@ -14292,7 +15698,7 @@
           <p:nvPr/>
         </p:nvPicPr>
         <p:blipFill>
-          <a:blip r:embed="rId103"/>
+          <a:blip r:embed="rId6"/>
           <a:stretch>
             <a:fillRect/>
           </a:stretch>
@@ -14340,7 +15746,7 @@
                 <a:ea typeface="Arial" pitchFamily="34" charset="-122"/>
                 <a:cs typeface="Arial" pitchFamily="34" charset="-120"/>
               </a:rPr>
-              <a:t xml:space="preserve">      Artık bir kutlama uzmanısın!</a:t>
+              <a:t>      Artık bir kutlama uzmanısın!</a:t>
             </a:r>
             <a:endParaRPr lang="en-US" sz="1200" dirty="0"/>
           </a:p>
@@ -14355,7 +15761,7 @@
           <p:nvPr/>
         </p:nvPicPr>
         <p:blipFill>
-          <a:blip r:embed="rId104"/>
+          <a:blip r:embed="rId7"/>
           <a:stretch>
             <a:fillRect/>
           </a:stretch>
@@ -14762,1349 +16168,6 @@
       <p:bldP spid="9" grpId="0" animBg="1"/>
       <p:bldP spid="11" grpId="0" animBg="1"/>
       <p:bldP spid="12" grpId="0" animBg="1"/>
-    </p:bldLst>
-  </p:timing>
-</p:sld>
-</file>
-
-<file path=ppt/slides/slide9.xml><?xml version="1.0" encoding="utf-8"?>
-<p:sld xmlns:a="http://schemas.openxmlformats.org/drawingml/2006/main" xmlns:r="http://schemas.openxmlformats.org/officeDocument/2006/relationships" xmlns:p="http://schemas.openxmlformats.org/presentationml/2006/main">
-  <p:cSld name="Slide 10">
-    <p:bg>
-      <p:bgPr>
-        <a:solidFill>
-          <a:srgbClr val="FFF7ED"/>
-        </a:solidFill>
-        <a:effectLst/>
-      </p:bgPr>
-    </p:bg>
-    <p:spTree>
-      <p:nvGrpSpPr>
-        <p:cNvPr id="1" name=""/>
-        <p:cNvGrpSpPr/>
-        <p:nvPr/>
-      </p:nvGrpSpPr>
-      <p:grpSpPr>
-        <a:xfrm>
-          <a:off x="0" y="0"/>
-          <a:ext cx="0" cy="0"/>
-          <a:chOff x="0" y="0"/>
-          <a:chExt cx="0" cy="0"/>
-        </a:xfrm>
-      </p:grpSpPr>
-      <p:sp>
-        <p:nvSpPr>
-          <p:cNvPr id="2" name="Shape 0"/>
-          <p:cNvSpPr/>
-          <p:nvPr/>
-        </p:nvSpPr>
-        <p:spPr>
-          <a:xfrm>
-            <a:off x="0" y="0"/>
-            <a:ext cx="9144000" cy="914400"/>
-          </a:xfrm>
-          <a:prstGeom prst="rect">
-            <a:avLst/>
-          </a:prstGeom>
-          <a:solidFill>
-            <a:srgbClr val="F59E0B"/>
-          </a:solidFill>
-          <a:ln/>
-        </p:spPr>
-      </p:sp>
-      <p:sp>
-        <p:nvSpPr>
-          <p:cNvPr id="3" name="Text 1"/>
-          <p:cNvSpPr/>
-          <p:nvPr/>
-        </p:nvSpPr>
-        <p:spPr>
-          <a:xfrm>
-            <a:off x="274320" y="91440"/>
-            <a:ext cx="8229600" cy="731520"/>
-          </a:xfrm>
-          <a:prstGeom prst="rect">
-            <a:avLst/>
-          </a:prstGeom>
-          <a:noFill/>
-          <a:ln/>
-        </p:spPr>
-        <p:txBody>
-          <a:bodyPr wrap="square" rtlCol="0" anchor="ctr"/>
-          <a:lstStyle/>
-          <a:p>
-            <a:pPr marL="0" indent="0" algn="ctr">
-              <a:buNone/>
-            </a:pPr>
-            <a:r>
-              <a:rPr lang="en-US" sz="2400" b="1" dirty="0">
-                <a:solidFill>
-                  <a:srgbClr val="1A2E5A"/>
-                </a:solidFill>
-                <a:latin typeface="Arial" pitchFamily="34" charset="0"/>
-                <a:ea typeface="Arial" pitchFamily="34" charset="-122"/>
-                <a:cs typeface="Arial" pitchFamily="34" charset="-120"/>
-              </a:rPr>
-              <a:t xml:space="preserve">      KÜLTÜR KÖŞESİ – DEDEKTİF SIRRI!</a:t>
-            </a:r>
-            <a:endParaRPr lang="en-US" sz="2400" dirty="0"/>
-          </a:p>
-        </p:txBody>
-      </p:sp>
-      <p:pic>
-        <p:nvPicPr>
-          <p:cNvPr id="19" name="Emoji 19" descr="emoji"/>
-          <p:cNvPicPr>
-            <a:picLocks noChangeAspect="1"/>
-          </p:cNvPicPr>
-          <p:nvPr/>
-        </p:nvPicPr>
-        <p:blipFill>
-          <a:blip r:embed="rId100"/>
-          <a:stretch>
-            <a:fillRect/>
-          </a:stretch>
-        </p:blipFill>
-        <p:spPr>
-          <a:xfrm>
-            <a:off x="1487704" y="304800"/>
-            <a:ext cx="304800" cy="304800"/>
-          </a:xfrm>
-          <a:prstGeom prst="rect">
-            <a:avLst/>
-          </a:prstGeom>
-        </p:spPr>
-      </p:pic>
-      <p:sp>
-        <p:nvSpPr>
-          <p:cNvPr id="4" name="Shape 2"/>
-          <p:cNvSpPr/>
-          <p:nvPr/>
-        </p:nvSpPr>
-        <p:spPr>
-          <a:xfrm>
-            <a:off x="731520" y="1097280"/>
-            <a:ext cx="7680960" cy="960120"/>
-          </a:xfrm>
-          <a:prstGeom prst="roundRect">
-            <a:avLst>
-              <a:gd name="adj" fmla="val 14286"/>
-            </a:avLst>
-          </a:prstGeom>
-          <a:solidFill>
-            <a:srgbClr val="FFFFFF"/>
-          </a:solidFill>
-          <a:ln/>
-          <a:effectLst>
-            <a:outerShdw blurRad="101600" dist="38100" dir="2700000" algn="bl" rotWithShape="0">
-              <a:srgbClr val="000000">
-                <a:alpha val="15000"/>
-              </a:srgbClr>
-            </a:outerShdw>
-          </a:effectLst>
-        </p:spPr>
-      </p:sp>
-      <p:sp>
-        <p:nvSpPr>
-          <p:cNvPr id="5" name="Text 3"/>
-          <p:cNvSpPr/>
-          <p:nvPr/>
-        </p:nvSpPr>
-        <p:spPr>
-          <a:xfrm>
-            <a:off x="914400" y="1170432"/>
-            <a:ext cx="7315200" cy="822960"/>
-          </a:xfrm>
-          <a:prstGeom prst="rect">
-            <a:avLst/>
-          </a:prstGeom>
-          <a:noFill/>
-          <a:ln/>
-        </p:spPr>
-        <p:txBody>
-          <a:bodyPr wrap="square" rtlCol="0" anchor="ctr"/>
-          <a:lstStyle/>
-          <a:p>
-            <a:pPr marL="0" indent="0" algn="ctr">
-              <a:buNone/>
-            </a:pPr>
-            <a:r>
-              <a:rPr lang="en-US" sz="1600" b="1" dirty="0">
-                <a:solidFill>
-                  <a:srgbClr val="1E293B"/>
-                </a:solidFill>
-                <a:latin typeface="Arial" pitchFamily="34" charset="0"/>
-                <a:ea typeface="Arial" pitchFamily="34" charset="-122"/>
-                <a:cs typeface="Arial" pitchFamily="34" charset="-120"/>
-              </a:rPr>
-              <a:t xml:space="preserve">      Türkçede büyüklere isimle seslenmeyiz.</a:t>
-            </a:r>
-            <a:endParaRPr lang="en-US" sz="1600" dirty="0"/>
-          </a:p>
-          <a:p>
-            <a:pPr marL="0" indent="0" algn="ctr">
-              <a:buNone/>
-            </a:pPr>
-            <a:r>
-              <a:rPr lang="en-US" sz="1600" b="1" dirty="0">
-                <a:solidFill>
-                  <a:srgbClr val="1E293B"/>
-                </a:solidFill>
-                <a:latin typeface="Arial" pitchFamily="34" charset="0"/>
-                <a:ea typeface="Arial" pitchFamily="34" charset="-122"/>
-                <a:cs typeface="Arial" pitchFamily="34" charset="-120"/>
-              </a:rPr>
-              <a:t>Onlara 'Ağabey (Abi)', 'Abla', 'Amca' veya 'Teyze' deriz.</a:t>
-            </a:r>
-            <a:endParaRPr lang="en-US" sz="1600" dirty="0"/>
-          </a:p>
-        </p:txBody>
-      </p:sp>
-      <p:pic>
-        <p:nvPicPr>
-          <p:cNvPr id="20" name="Emoji 20" descr="emoji"/>
-          <p:cNvPicPr>
-            <a:picLocks noChangeAspect="1"/>
-          </p:cNvPicPr>
-          <p:nvPr/>
-        </p:nvPicPr>
-        <p:blipFill>
-          <a:blip r:embed="rId101"/>
-          <a:stretch>
-            <a:fillRect/>
-          </a:stretch>
-        </p:blipFill>
-        <p:spPr>
-          <a:xfrm>
-            <a:off x="2482599" y="1361440"/>
-            <a:ext cx="203200" cy="203200"/>
-          </a:xfrm>
-          <a:prstGeom prst="rect">
-            <a:avLst/>
-          </a:prstGeom>
-        </p:spPr>
-      </p:pic>
-      <p:sp>
-        <p:nvSpPr>
-          <p:cNvPr id="6" name="Shape 4"/>
-          <p:cNvSpPr/>
-          <p:nvPr/>
-        </p:nvSpPr>
-        <p:spPr>
-          <a:xfrm>
-            <a:off x="548640" y="2240280"/>
-            <a:ext cx="2468880" cy="1371600"/>
-          </a:xfrm>
-          <a:prstGeom prst="roundRect">
-            <a:avLst>
-              <a:gd name="adj" fmla="val 10000"/>
-            </a:avLst>
-          </a:prstGeom>
-          <a:solidFill>
-            <a:srgbClr val="DBEAFE"/>
-          </a:solidFill>
-          <a:ln/>
-          <a:effectLst>
-            <a:outerShdw blurRad="101600" dist="38100" dir="2700000" algn="bl" rotWithShape="0">
-              <a:srgbClr val="000000">
-                <a:alpha val="15000"/>
-              </a:srgbClr>
-            </a:outerShdw>
-          </a:effectLst>
-        </p:spPr>
-      </p:sp>
-      <p:sp>
-        <p:nvSpPr>
-          <p:cNvPr id="7" name="Text 5"/>
-          <p:cNvSpPr/>
-          <p:nvPr/>
-        </p:nvSpPr>
-        <p:spPr>
-          <a:xfrm>
-            <a:off x="548640" y="2286000"/>
-            <a:ext cx="2468880" cy="777240"/>
-          </a:xfrm>
-          <a:prstGeom prst="rect">
-            <a:avLst/>
-          </a:prstGeom>
-          <a:noFill/>
-          <a:ln/>
-        </p:spPr>
-        <p:txBody>
-          <a:bodyPr wrap="square" rtlCol="0" anchor="ctr"/>
-          <a:lstStyle/>
-          <a:p>
-            <a:pPr marL="0" indent="0" algn="ctr">
-              <a:buNone/>
-            </a:pPr>
-            <a:r>
-              <a:rPr lang="en-US" sz="3200" dirty="0">
-                <a:solidFill>
-                  <a:srgbClr val="000000"/>
-                </a:solidFill>
-              </a:rPr>
-              <a:t xml:space="preserve">    </a:t>
-            </a:r>
-            <a:endParaRPr lang="en-US" sz="3200" dirty="0"/>
-          </a:p>
-        </p:txBody>
-      </p:sp>
-      <p:pic>
-        <p:nvPicPr>
-          <p:cNvPr id="21" name="Emoji 21" descr="emoji"/>
-          <p:cNvPicPr>
-            <a:picLocks noChangeAspect="1"/>
-          </p:cNvPicPr>
-          <p:nvPr/>
-        </p:nvPicPr>
-        <p:blipFill>
-          <a:blip r:embed="rId102"/>
-          <a:stretch>
-            <a:fillRect/>
-          </a:stretch>
-        </p:blipFill>
-        <p:spPr>
-          <a:xfrm>
-            <a:off x="1579880" y="2471420"/>
-            <a:ext cx="406400" cy="406400"/>
-          </a:xfrm>
-          <a:prstGeom prst="rect">
-            <a:avLst/>
-          </a:prstGeom>
-        </p:spPr>
-      </p:pic>
-      <p:sp>
-        <p:nvSpPr>
-          <p:cNvPr id="8" name="Text 6"/>
-          <p:cNvSpPr/>
-          <p:nvPr/>
-        </p:nvSpPr>
-        <p:spPr>
-          <a:xfrm>
-            <a:off x="640080" y="3017520"/>
-            <a:ext cx="2286000" cy="502920"/>
-          </a:xfrm>
-          <a:prstGeom prst="rect">
-            <a:avLst/>
-          </a:prstGeom>
-          <a:noFill/>
-          <a:ln/>
-        </p:spPr>
-        <p:txBody>
-          <a:bodyPr wrap="square" rtlCol="0" anchor="ctr"/>
-          <a:lstStyle/>
-          <a:p>
-            <a:pPr marL="0" indent="0" algn="ctr">
-              <a:buNone/>
-            </a:pPr>
-            <a:r>
-              <a:rPr lang="en-US" sz="1400" b="1" dirty="0">
-                <a:solidFill>
-                  <a:srgbClr val="1A2E5A"/>
-                </a:solidFill>
-                <a:latin typeface="Arial" pitchFamily="34" charset="0"/>
-                <a:ea typeface="Arial" pitchFamily="34" charset="-122"/>
-                <a:cs typeface="Arial" pitchFamily="34" charset="-120"/>
-              </a:rPr>
-              <a:t>Ayşe — 7 yaş</a:t>
-            </a:r>
-            <a:endParaRPr lang="en-US" sz="1400" dirty="0"/>
-          </a:p>
-        </p:txBody>
-      </p:sp>
-      <p:sp>
-        <p:nvSpPr>
-          <p:cNvPr id="9" name="Shape 7"/>
-          <p:cNvSpPr/>
-          <p:nvPr/>
-        </p:nvSpPr>
-        <p:spPr>
-          <a:xfrm>
-            <a:off x="3246120" y="2240280"/>
-            <a:ext cx="2468880" cy="1371600"/>
-          </a:xfrm>
-          <a:prstGeom prst="roundRect">
-            <a:avLst>
-              <a:gd name="adj" fmla="val 10000"/>
-            </a:avLst>
-          </a:prstGeom>
-          <a:solidFill>
-            <a:srgbClr val="DBEAFE"/>
-          </a:solidFill>
-          <a:ln/>
-          <a:effectLst>
-            <a:outerShdw blurRad="101600" dist="38100" dir="2700000" algn="bl" rotWithShape="0">
-              <a:srgbClr val="000000">
-                <a:alpha val="15000"/>
-              </a:srgbClr>
-            </a:outerShdw>
-          </a:effectLst>
-        </p:spPr>
-      </p:sp>
-      <p:sp>
-        <p:nvSpPr>
-          <p:cNvPr id="10" name="Text 8"/>
-          <p:cNvSpPr/>
-          <p:nvPr/>
-        </p:nvSpPr>
-        <p:spPr>
-          <a:xfrm>
-            <a:off x="3246120" y="2286000"/>
-            <a:ext cx="2468880" cy="777240"/>
-          </a:xfrm>
-          <a:prstGeom prst="rect">
-            <a:avLst/>
-          </a:prstGeom>
-          <a:noFill/>
-          <a:ln/>
-        </p:spPr>
-        <p:txBody>
-          <a:bodyPr wrap="square" rtlCol="0" anchor="ctr"/>
-          <a:lstStyle/>
-          <a:p>
-            <a:pPr marL="0" indent="0" algn="ctr">
-              <a:buNone/>
-            </a:pPr>
-            <a:r>
-              <a:rPr lang="en-US" sz="3200" dirty="0">
-                <a:solidFill>
-                  <a:srgbClr val="000000"/>
-                </a:solidFill>
-              </a:rPr>
-              <a:t xml:space="preserve">    </a:t>
-            </a:r>
-            <a:endParaRPr lang="en-US" sz="3200" dirty="0"/>
-          </a:p>
-        </p:txBody>
-      </p:sp>
-      <p:pic>
-        <p:nvPicPr>
-          <p:cNvPr id="22" name="Emoji 22" descr="emoji"/>
-          <p:cNvPicPr>
-            <a:picLocks noChangeAspect="1"/>
-          </p:cNvPicPr>
-          <p:nvPr/>
-        </p:nvPicPr>
-        <p:blipFill>
-          <a:blip r:embed="rId103"/>
-          <a:stretch>
-            <a:fillRect/>
-          </a:stretch>
-        </p:blipFill>
-        <p:spPr>
-          <a:xfrm>
-            <a:off x="4277360" y="2471420"/>
-            <a:ext cx="406400" cy="406400"/>
-          </a:xfrm>
-          <a:prstGeom prst="rect">
-            <a:avLst/>
-          </a:prstGeom>
-        </p:spPr>
-      </p:pic>
-      <p:sp>
-        <p:nvSpPr>
-          <p:cNvPr id="11" name="Text 9"/>
-          <p:cNvSpPr/>
-          <p:nvPr/>
-        </p:nvSpPr>
-        <p:spPr>
-          <a:xfrm>
-            <a:off x="3337560" y="3017520"/>
-            <a:ext cx="2286000" cy="502920"/>
-          </a:xfrm>
-          <a:prstGeom prst="rect">
-            <a:avLst/>
-          </a:prstGeom>
-          <a:noFill/>
-          <a:ln/>
-        </p:spPr>
-        <p:txBody>
-          <a:bodyPr wrap="square" rtlCol="0" anchor="ctr"/>
-          <a:lstStyle/>
-          <a:p>
-            <a:pPr marL="0" indent="0" algn="ctr">
-              <a:buNone/>
-            </a:pPr>
-            <a:r>
-              <a:rPr lang="en-US" sz="1400" b="1" dirty="0">
-                <a:solidFill>
-                  <a:srgbClr val="1A2E5A"/>
-                </a:solidFill>
-                <a:latin typeface="Arial" pitchFamily="34" charset="0"/>
-                <a:ea typeface="Arial" pitchFamily="34" charset="-122"/>
-                <a:cs typeface="Arial" pitchFamily="34" charset="-120"/>
-              </a:rPr>
-              <a:t>Fatma — 17 yaş</a:t>
-            </a:r>
-            <a:endParaRPr lang="en-US" sz="1400" dirty="0"/>
-          </a:p>
-        </p:txBody>
-      </p:sp>
-      <p:sp>
-        <p:nvSpPr>
-          <p:cNvPr id="12" name="Shape 10"/>
-          <p:cNvSpPr/>
-          <p:nvPr/>
-        </p:nvSpPr>
-        <p:spPr>
-          <a:xfrm>
-            <a:off x="5943600" y="2240280"/>
-            <a:ext cx="2468880" cy="1371600"/>
-          </a:xfrm>
-          <a:prstGeom prst="roundRect">
-            <a:avLst>
-              <a:gd name="adj" fmla="val 10000"/>
-            </a:avLst>
-          </a:prstGeom>
-          <a:solidFill>
-            <a:srgbClr val="DBEAFE"/>
-          </a:solidFill>
-          <a:ln/>
-          <a:effectLst>
-            <a:outerShdw blurRad="101600" dist="38100" dir="2700000" algn="bl" rotWithShape="0">
-              <a:srgbClr val="000000">
-                <a:alpha val="15000"/>
-              </a:srgbClr>
-            </a:outerShdw>
-          </a:effectLst>
-        </p:spPr>
-      </p:sp>
-      <p:sp>
-        <p:nvSpPr>
-          <p:cNvPr id="13" name="Text 11"/>
-          <p:cNvSpPr/>
-          <p:nvPr/>
-        </p:nvSpPr>
-        <p:spPr>
-          <a:xfrm>
-            <a:off x="5943600" y="2286000"/>
-            <a:ext cx="2468880" cy="777240"/>
-          </a:xfrm>
-          <a:prstGeom prst="rect">
-            <a:avLst/>
-          </a:prstGeom>
-          <a:noFill/>
-          <a:ln/>
-        </p:spPr>
-        <p:txBody>
-          <a:bodyPr wrap="square" rtlCol="0" anchor="ctr"/>
-          <a:lstStyle/>
-          <a:p>
-            <a:pPr marL="0" indent="0" algn="ctr">
-              <a:buNone/>
-            </a:pPr>
-            <a:r>
-              <a:rPr lang="en-US" sz="3200" dirty="0">
-                <a:solidFill>
-                  <a:srgbClr val="000000"/>
-                </a:solidFill>
-              </a:rPr>
-              <a:t xml:space="preserve">    </a:t>
-            </a:r>
-            <a:endParaRPr lang="en-US" sz="3200" dirty="0"/>
-          </a:p>
-        </p:txBody>
-      </p:sp>
-      <p:pic>
-        <p:nvPicPr>
-          <p:cNvPr id="23" name="Emoji 23" descr="emoji"/>
-          <p:cNvPicPr>
-            <a:picLocks noChangeAspect="1"/>
-          </p:cNvPicPr>
-          <p:nvPr/>
-        </p:nvPicPr>
-        <p:blipFill>
-          <a:blip r:embed="rId104"/>
-          <a:stretch>
-            <a:fillRect/>
-          </a:stretch>
-        </p:blipFill>
-        <p:spPr>
-          <a:xfrm>
-            <a:off x="6974840" y="2471420"/>
-            <a:ext cx="406400" cy="406400"/>
-          </a:xfrm>
-          <a:prstGeom prst="rect">
-            <a:avLst/>
-          </a:prstGeom>
-        </p:spPr>
-      </p:pic>
-      <p:sp>
-        <p:nvSpPr>
-          <p:cNvPr id="14" name="Text 12"/>
-          <p:cNvSpPr/>
-          <p:nvPr/>
-        </p:nvSpPr>
-        <p:spPr>
-          <a:xfrm>
-            <a:off x="6035040" y="3017520"/>
-            <a:ext cx="2286000" cy="502920"/>
-          </a:xfrm>
-          <a:prstGeom prst="rect">
-            <a:avLst/>
-          </a:prstGeom>
-          <a:noFill/>
-          <a:ln/>
-        </p:spPr>
-        <p:txBody>
-          <a:bodyPr wrap="square" rtlCol="0" anchor="ctr"/>
-          <a:lstStyle/>
-          <a:p>
-            <a:pPr marL="0" indent="0" algn="ctr">
-              <a:buNone/>
-            </a:pPr>
-            <a:r>
-              <a:rPr lang="en-US" sz="1400" b="1" dirty="0">
-                <a:solidFill>
-                  <a:srgbClr val="1A2E5A"/>
-                </a:solidFill>
-                <a:latin typeface="Arial" pitchFamily="34" charset="0"/>
-                <a:ea typeface="Arial" pitchFamily="34" charset="-122"/>
-                <a:cs typeface="Arial" pitchFamily="34" charset="-120"/>
-              </a:rPr>
-              <a:t>Hüseyin — 17 yaş</a:t>
-            </a:r>
-            <a:endParaRPr lang="en-US" sz="1400" dirty="0"/>
-          </a:p>
-        </p:txBody>
-      </p:sp>
-      <p:sp>
-        <p:nvSpPr>
-          <p:cNvPr id="15" name="Shape 13"/>
-          <p:cNvSpPr/>
-          <p:nvPr/>
-        </p:nvSpPr>
-        <p:spPr>
-          <a:xfrm>
-            <a:off x="731520" y="3657600"/>
-            <a:ext cx="7680960" cy="914400"/>
-          </a:xfrm>
-          <a:prstGeom prst="roundRect">
-            <a:avLst>
-              <a:gd name="adj" fmla="val 15000"/>
-            </a:avLst>
-          </a:prstGeom>
-          <a:solidFill>
-            <a:srgbClr val="16A34A"/>
-          </a:solidFill>
-          <a:ln/>
-          <a:effectLst>
-            <a:outerShdw blurRad="101600" dist="38100" dir="2700000" algn="bl" rotWithShape="0">
-              <a:srgbClr val="000000">
-                <a:alpha val="15000"/>
-              </a:srgbClr>
-            </a:outerShdw>
-          </a:effectLst>
-        </p:spPr>
-      </p:sp>
-      <p:sp>
-        <p:nvSpPr>
-          <p:cNvPr id="16" name="Text 14"/>
-          <p:cNvSpPr/>
-          <p:nvPr/>
-        </p:nvSpPr>
-        <p:spPr>
-          <a:xfrm>
-            <a:off x="914400" y="3703320"/>
-            <a:ext cx="7315200" cy="822960"/>
-          </a:xfrm>
-          <a:prstGeom prst="rect">
-            <a:avLst/>
-          </a:prstGeom>
-          <a:noFill/>
-          <a:ln/>
-        </p:spPr>
-        <p:txBody>
-          <a:bodyPr wrap="square" rtlCol="0" anchor="ctr"/>
-          <a:lstStyle/>
-          <a:p>
-            <a:pPr marL="0" indent="0" algn="ctr">
-              <a:buNone/>
-            </a:pPr>
-            <a:r>
-              <a:rPr lang="en-US" sz="1400" b="1" dirty="0">
-                <a:solidFill>
-                  <a:srgbClr val="FFFFFF"/>
-                </a:solidFill>
-                <a:latin typeface="Arial" pitchFamily="34" charset="0"/>
-                <a:ea typeface="Arial" pitchFamily="34" charset="-122"/>
-                <a:cs typeface="Arial" pitchFamily="34" charset="-120"/>
-              </a:rPr>
-              <a:t>Ayşe, </a:t>
-            </a:r>
-            <a:r>
-              <a:rPr lang="en-US" sz="1400" b="1" dirty="0" err="1">
-                <a:solidFill>
-                  <a:srgbClr val="FFFFFF"/>
-                </a:solidFill>
-                <a:latin typeface="Arial" pitchFamily="34" charset="0"/>
-                <a:ea typeface="Arial" pitchFamily="34" charset="-122"/>
-                <a:cs typeface="Arial" pitchFamily="34" charset="-120"/>
-              </a:rPr>
-              <a:t>Fatma'ya</a:t>
-            </a:r>
-            <a:r>
-              <a:rPr lang="en-US" sz="1400" b="1" dirty="0">
-                <a:solidFill>
-                  <a:srgbClr val="FFFFFF"/>
-                </a:solidFill>
-                <a:latin typeface="Arial" pitchFamily="34" charset="0"/>
-                <a:ea typeface="Arial" pitchFamily="34" charset="-122"/>
-                <a:cs typeface="Arial" pitchFamily="34" charset="-120"/>
-              </a:rPr>
-              <a:t>: 'Fatma Abla!'  •  Hüseyin'e: 'Hüseyin Abi!'</a:t>
-            </a:r>
-            <a:endParaRPr lang="en-US" sz="1400" dirty="0"/>
-          </a:p>
-          <a:p>
-            <a:pPr marL="0" indent="0" algn="ctr">
-              <a:buNone/>
-            </a:pPr>
-            <a:r>
-              <a:rPr lang="en-US" sz="1400" b="1" dirty="0">
-                <a:solidFill>
-                  <a:srgbClr val="FFFFFF"/>
-                </a:solidFill>
-                <a:latin typeface="Arial" pitchFamily="34" charset="0"/>
-                <a:ea typeface="Arial" pitchFamily="34" charset="-122"/>
-                <a:cs typeface="Arial" pitchFamily="34" charset="-120"/>
-              </a:rPr>
-              <a:t>Fatma ile Hüseyin akran. Fatma, Hüseyin'e sadece 'Hüseyin!' der.</a:t>
-            </a:r>
-            <a:endParaRPr lang="en-US" sz="1400" dirty="0"/>
-          </a:p>
-        </p:txBody>
-      </p:sp>
-      <p:sp>
-        <p:nvSpPr>
-          <p:cNvPr id="17" name="Shape 15"/>
-          <p:cNvSpPr/>
-          <p:nvPr/>
-        </p:nvSpPr>
-        <p:spPr>
-          <a:xfrm>
-            <a:off x="3017520" y="4616963"/>
-            <a:ext cx="3108960" cy="502920"/>
-          </a:xfrm>
-          <a:prstGeom prst="roundRect">
-            <a:avLst>
-              <a:gd name="adj" fmla="val 49091"/>
-            </a:avLst>
-          </a:prstGeom>
-          <a:solidFill>
-            <a:srgbClr val="DC2626"/>
-          </a:solidFill>
-          <a:ln/>
-          <a:effectLst>
-            <a:outerShdw blurRad="101600" dist="38100" dir="2700000" algn="bl" rotWithShape="0">
-              <a:srgbClr val="000000">
-                <a:alpha val="15000"/>
-              </a:srgbClr>
-            </a:outerShdw>
-          </a:effectLst>
-        </p:spPr>
-        <p:txBody>
-          <a:bodyPr/>
-          <a:lstStyle/>
-          <a:p>
-            <a:endParaRPr lang="tr-TR" dirty="0"/>
-          </a:p>
-        </p:txBody>
-      </p:sp>
-      <p:sp>
-        <p:nvSpPr>
-          <p:cNvPr id="18" name="Text 16"/>
-          <p:cNvSpPr/>
-          <p:nvPr/>
-        </p:nvSpPr>
-        <p:spPr>
-          <a:xfrm>
-            <a:off x="2926080" y="4623624"/>
-            <a:ext cx="3108960" cy="502920"/>
-          </a:xfrm>
-          <a:prstGeom prst="rect">
-            <a:avLst/>
-          </a:prstGeom>
-          <a:noFill/>
-          <a:ln/>
-        </p:spPr>
-        <p:txBody>
-          <a:bodyPr wrap="square" rtlCol="0" anchor="ctr"/>
-          <a:lstStyle/>
-          <a:p>
-            <a:pPr marL="0" indent="0" algn="ctr">
-              <a:buNone/>
-            </a:pPr>
-            <a:r>
-              <a:rPr lang="en-US" sz="1400" b="1" dirty="0">
-                <a:solidFill>
-                  <a:srgbClr val="FFFFFF"/>
-                </a:solidFill>
-                <a:latin typeface="Arial" pitchFamily="34" charset="0"/>
-                <a:ea typeface="Arial" pitchFamily="34" charset="-122"/>
-                <a:cs typeface="Arial" pitchFamily="34" charset="-120"/>
-              </a:rPr>
-              <a:t xml:space="preserve">      Düşün!</a:t>
-            </a:r>
-            <a:endParaRPr lang="en-US" sz="1400" dirty="0"/>
-          </a:p>
-        </p:txBody>
-      </p:sp>
-      <p:pic>
-        <p:nvPicPr>
-          <p:cNvPr id="24" name="Emoji 24" descr="emoji"/>
-          <p:cNvPicPr>
-            <a:picLocks noChangeAspect="1"/>
-          </p:cNvPicPr>
-          <p:nvPr/>
-        </p:nvPicPr>
-        <p:blipFill>
-          <a:blip r:embed="rId105"/>
-          <a:stretch>
-            <a:fillRect/>
-          </a:stretch>
-        </p:blipFill>
-        <p:spPr>
-          <a:xfrm>
-            <a:off x="4036101" y="4786184"/>
-            <a:ext cx="177800" cy="177800"/>
-          </a:xfrm>
-          <a:prstGeom prst="rect">
-            <a:avLst/>
-          </a:prstGeom>
-        </p:spPr>
-      </p:pic>
-    </p:spTree>
-  </p:cSld>
-  <p:clrMapOvr>
-    <a:masterClrMapping/>
-  </p:clrMapOvr>
-  <p:timing>
-    <p:tnLst>
-      <p:par>
-        <p:cTn id="1" dur="indefinite" restart="never" nodeType="tmRoot">
-          <p:childTnLst>
-            <p:seq concurrent="1" nextAc="seek">
-              <p:cTn id="2" dur="indefinite" nodeType="mainSeq">
-                <p:childTnLst>
-                  <p:par>
-                    <p:cTn id="3" fill="hold">
-                      <p:stCondLst>
-                        <p:cond delay="indefinite"/>
-                      </p:stCondLst>
-                      <p:childTnLst>
-                        <p:par>
-                          <p:cTn id="4" fill="hold">
-                            <p:stCondLst>
-                              <p:cond delay="0"/>
-                            </p:stCondLst>
-                            <p:childTnLst>
-                              <p:par>
-                                <p:cTn id="5" presetID="1" presetClass="entr" presetSubtype="0" fill="hold" grpId="0" nodeType="clickEffect">
-                                  <p:stCondLst>
-                                    <p:cond delay="0"/>
-                                  </p:stCondLst>
-                                  <p:childTnLst>
-                                    <p:set>
-                                      <p:cBhvr>
-                                        <p:cTn id="6" dur="1" fill="hold">
-                                          <p:stCondLst>
-                                            <p:cond delay="0"/>
-                                          </p:stCondLst>
-                                        </p:cTn>
-                                        <p:tgtEl>
-                                          <p:spTgt spid="5"/>
-                                        </p:tgtEl>
-                                        <p:attrNameLst>
-                                          <p:attrName>style.visibility</p:attrName>
-                                        </p:attrNameLst>
-                                      </p:cBhvr>
-                                      <p:to>
-                                        <p:strVal val="visible"/>
-                                      </p:to>
-                                    </p:set>
-                                  </p:childTnLst>
-                                </p:cTn>
-                              </p:par>
-                            </p:childTnLst>
-                          </p:cTn>
-                        </p:par>
-                      </p:childTnLst>
-                    </p:cTn>
-                  </p:par>
-                  <p:par>
-                    <p:cTn id="7" fill="hold">
-                      <p:stCondLst>
-                        <p:cond delay="indefinite"/>
-                      </p:stCondLst>
-                      <p:childTnLst>
-                        <p:par>
-                          <p:cTn id="8" fill="hold">
-                            <p:stCondLst>
-                              <p:cond delay="0"/>
-                            </p:stCondLst>
-                            <p:childTnLst>
-                              <p:par>
-                                <p:cTn id="9" presetID="1" presetClass="entr" presetSubtype="0" fill="hold" nodeType="clickEffect">
-                                  <p:stCondLst>
-                                    <p:cond delay="0"/>
-                                  </p:stCondLst>
-                                  <p:childTnLst>
-                                    <p:set>
-                                      <p:cBhvr>
-                                        <p:cTn id="10" dur="1" fill="hold">
-                                          <p:stCondLst>
-                                            <p:cond delay="0"/>
-                                          </p:stCondLst>
-                                        </p:cTn>
-                                        <p:tgtEl>
-                                          <p:spTgt spid="6"/>
-                                        </p:tgtEl>
-                                        <p:attrNameLst>
-                                          <p:attrName>style.visibility</p:attrName>
-                                        </p:attrNameLst>
-                                      </p:cBhvr>
-                                      <p:to>
-                                        <p:strVal val="visible"/>
-                                      </p:to>
-                                    </p:set>
-                                  </p:childTnLst>
-                                </p:cTn>
-                              </p:par>
-                              <p:par>
-                                <p:cTn id="11" presetID="1" presetClass="entr" presetSubtype="0" fill="hold" grpId="0" nodeType="withEffect">
-                                  <p:stCondLst>
-                                    <p:cond delay="0"/>
-                                  </p:stCondLst>
-                                  <p:childTnLst>
-                                    <p:set>
-                                      <p:cBhvr>
-                                        <p:cTn id="12" dur="1" fill="hold">
-                                          <p:stCondLst>
-                                            <p:cond delay="0"/>
-                                          </p:stCondLst>
-                                        </p:cTn>
-                                        <p:tgtEl>
-                                          <p:spTgt spid="7"/>
-                                        </p:tgtEl>
-                                        <p:attrNameLst>
-                                          <p:attrName>style.visibility</p:attrName>
-                                        </p:attrNameLst>
-                                      </p:cBhvr>
-                                      <p:to>
-                                        <p:strVal val="visible"/>
-                                      </p:to>
-                                    </p:set>
-                                  </p:childTnLst>
-                                </p:cTn>
-                              </p:par>
-                              <p:par>
-                                <p:cTn id="13" presetID="1" presetClass="entr" presetSubtype="0" fill="hold" grpId="0" nodeType="withEffect">
-                                  <p:stCondLst>
-                                    <p:cond delay="0"/>
-                                  </p:stCondLst>
-                                  <p:childTnLst>
-                                    <p:set>
-                                      <p:cBhvr>
-                                        <p:cTn id="14" dur="1" fill="hold">
-                                          <p:stCondLst>
-                                            <p:cond delay="0"/>
-                                          </p:stCondLst>
-                                        </p:cTn>
-                                        <p:tgtEl>
-                                          <p:spTgt spid="8"/>
-                                        </p:tgtEl>
-                                        <p:attrNameLst>
-                                          <p:attrName>style.visibility</p:attrName>
-                                        </p:attrNameLst>
-                                      </p:cBhvr>
-                                      <p:to>
-                                        <p:strVal val="visible"/>
-                                      </p:to>
-                                    </p:set>
-                                  </p:childTnLst>
-                                </p:cTn>
-                              </p:par>
-                            </p:childTnLst>
-                          </p:cTn>
-                        </p:par>
-                      </p:childTnLst>
-                    </p:cTn>
-                  </p:par>
-                  <p:par>
-                    <p:cTn id="15" fill="hold">
-                      <p:stCondLst>
-                        <p:cond delay="indefinite"/>
-                      </p:stCondLst>
-                      <p:childTnLst>
-                        <p:par>
-                          <p:cTn id="16" fill="hold">
-                            <p:stCondLst>
-                              <p:cond delay="0"/>
-                            </p:stCondLst>
-                            <p:childTnLst>
-                              <p:par>
-                                <p:cTn id="17" presetID="1" presetClass="entr" presetSubtype="0" fill="hold" nodeType="clickEffect">
-                                  <p:stCondLst>
-                                    <p:cond delay="0"/>
-                                  </p:stCondLst>
-                                  <p:childTnLst>
-                                    <p:set>
-                                      <p:cBhvr>
-                                        <p:cTn id="18" dur="1" fill="hold">
-                                          <p:stCondLst>
-                                            <p:cond delay="0"/>
-                                          </p:stCondLst>
-                                        </p:cTn>
-                                        <p:tgtEl>
-                                          <p:spTgt spid="9"/>
-                                        </p:tgtEl>
-                                        <p:attrNameLst>
-                                          <p:attrName>style.visibility</p:attrName>
-                                        </p:attrNameLst>
-                                      </p:cBhvr>
-                                      <p:to>
-                                        <p:strVal val="visible"/>
-                                      </p:to>
-                                    </p:set>
-                                  </p:childTnLst>
-                                </p:cTn>
-                              </p:par>
-                              <p:par>
-                                <p:cTn id="19" presetID="1" presetClass="entr" presetSubtype="0" fill="hold" grpId="0" nodeType="withEffect">
-                                  <p:stCondLst>
-                                    <p:cond delay="0"/>
-                                  </p:stCondLst>
-                                  <p:childTnLst>
-                                    <p:set>
-                                      <p:cBhvr>
-                                        <p:cTn id="20" dur="1" fill="hold">
-                                          <p:stCondLst>
-                                            <p:cond delay="0"/>
-                                          </p:stCondLst>
-                                        </p:cTn>
-                                        <p:tgtEl>
-                                          <p:spTgt spid="10"/>
-                                        </p:tgtEl>
-                                        <p:attrNameLst>
-                                          <p:attrName>style.visibility</p:attrName>
-                                        </p:attrNameLst>
-                                      </p:cBhvr>
-                                      <p:to>
-                                        <p:strVal val="visible"/>
-                                      </p:to>
-                                    </p:set>
-                                  </p:childTnLst>
-                                </p:cTn>
-                              </p:par>
-                              <p:par>
-                                <p:cTn id="21" presetID="1" presetClass="entr" presetSubtype="0" fill="hold" grpId="0" nodeType="withEffect">
-                                  <p:stCondLst>
-                                    <p:cond delay="0"/>
-                                  </p:stCondLst>
-                                  <p:childTnLst>
-                                    <p:set>
-                                      <p:cBhvr>
-                                        <p:cTn id="22" dur="1" fill="hold">
-                                          <p:stCondLst>
-                                            <p:cond delay="0"/>
-                                          </p:stCondLst>
-                                        </p:cTn>
-                                        <p:tgtEl>
-                                          <p:spTgt spid="11"/>
-                                        </p:tgtEl>
-                                        <p:attrNameLst>
-                                          <p:attrName>style.visibility</p:attrName>
-                                        </p:attrNameLst>
-                                      </p:cBhvr>
-                                      <p:to>
-                                        <p:strVal val="visible"/>
-                                      </p:to>
-                                    </p:set>
-                                  </p:childTnLst>
-                                </p:cTn>
-                              </p:par>
-                            </p:childTnLst>
-                          </p:cTn>
-                        </p:par>
-                      </p:childTnLst>
-                    </p:cTn>
-                  </p:par>
-                  <p:par>
-                    <p:cTn id="23" fill="hold">
-                      <p:stCondLst>
-                        <p:cond delay="indefinite"/>
-                      </p:stCondLst>
-                      <p:childTnLst>
-                        <p:par>
-                          <p:cTn id="24" fill="hold">
-                            <p:stCondLst>
-                              <p:cond delay="0"/>
-                            </p:stCondLst>
-                            <p:childTnLst>
-                              <p:par>
-                                <p:cTn id="25" presetID="1" presetClass="entr" presetSubtype="0" fill="hold" nodeType="clickEffect">
-                                  <p:stCondLst>
-                                    <p:cond delay="0"/>
-                                  </p:stCondLst>
-                                  <p:childTnLst>
-                                    <p:set>
-                                      <p:cBhvr>
-                                        <p:cTn id="26" dur="1" fill="hold">
-                                          <p:stCondLst>
-                                            <p:cond delay="0"/>
-                                          </p:stCondLst>
-                                        </p:cTn>
-                                        <p:tgtEl>
-                                          <p:spTgt spid="12"/>
-                                        </p:tgtEl>
-                                        <p:attrNameLst>
-                                          <p:attrName>style.visibility</p:attrName>
-                                        </p:attrNameLst>
-                                      </p:cBhvr>
-                                      <p:to>
-                                        <p:strVal val="visible"/>
-                                      </p:to>
-                                    </p:set>
-                                  </p:childTnLst>
-                                </p:cTn>
-                              </p:par>
-                              <p:par>
-                                <p:cTn id="27" presetID="1" presetClass="entr" presetSubtype="0" fill="hold" grpId="0" nodeType="withEffect">
-                                  <p:stCondLst>
-                                    <p:cond delay="0"/>
-                                  </p:stCondLst>
-                                  <p:childTnLst>
-                                    <p:set>
-                                      <p:cBhvr>
-                                        <p:cTn id="28" dur="1" fill="hold">
-                                          <p:stCondLst>
-                                            <p:cond delay="0"/>
-                                          </p:stCondLst>
-                                        </p:cTn>
-                                        <p:tgtEl>
-                                          <p:spTgt spid="13"/>
-                                        </p:tgtEl>
-                                        <p:attrNameLst>
-                                          <p:attrName>style.visibility</p:attrName>
-                                        </p:attrNameLst>
-                                      </p:cBhvr>
-                                      <p:to>
-                                        <p:strVal val="visible"/>
-                                      </p:to>
-                                    </p:set>
-                                  </p:childTnLst>
-                                </p:cTn>
-                              </p:par>
-                              <p:par>
-                                <p:cTn id="29" presetID="1" presetClass="entr" presetSubtype="0" fill="hold" grpId="0" nodeType="withEffect">
-                                  <p:stCondLst>
-                                    <p:cond delay="0"/>
-                                  </p:stCondLst>
-                                  <p:childTnLst>
-                                    <p:set>
-                                      <p:cBhvr>
-                                        <p:cTn id="30" dur="1" fill="hold">
-                                          <p:stCondLst>
-                                            <p:cond delay="0"/>
-                                          </p:stCondLst>
-                                        </p:cTn>
-                                        <p:tgtEl>
-                                          <p:spTgt spid="14"/>
-                                        </p:tgtEl>
-                                        <p:attrNameLst>
-                                          <p:attrName>style.visibility</p:attrName>
-                                        </p:attrNameLst>
-                                      </p:cBhvr>
-                                      <p:to>
-                                        <p:strVal val="visible"/>
-                                      </p:to>
-                                    </p:set>
-                                  </p:childTnLst>
-                                </p:cTn>
-                              </p:par>
-                            </p:childTnLst>
-                          </p:cTn>
-                        </p:par>
-                      </p:childTnLst>
-                    </p:cTn>
-                  </p:par>
-                  <p:par>
-                    <p:cTn id="31" fill="hold">
-                      <p:stCondLst>
-                        <p:cond delay="indefinite"/>
-                      </p:stCondLst>
-                      <p:childTnLst>
-                        <p:par>
-                          <p:cTn id="32" fill="hold">
-                            <p:stCondLst>
-                              <p:cond delay="0"/>
-                            </p:stCondLst>
-                            <p:childTnLst>
-                              <p:par>
-                                <p:cTn id="33" presetID="1" presetClass="entr" presetSubtype="0" fill="hold" nodeType="clickEffect">
-                                  <p:stCondLst>
-                                    <p:cond delay="0"/>
-                                  </p:stCondLst>
-                                  <p:childTnLst>
-                                    <p:set>
-                                      <p:cBhvr>
-                                        <p:cTn id="34" dur="1" fill="hold">
-                                          <p:stCondLst>
-                                            <p:cond delay="0"/>
-                                          </p:stCondLst>
-                                        </p:cTn>
-                                        <p:tgtEl>
-                                          <p:spTgt spid="15"/>
-                                        </p:tgtEl>
-                                        <p:attrNameLst>
-                                          <p:attrName>style.visibility</p:attrName>
-                                        </p:attrNameLst>
-                                      </p:cBhvr>
-                                      <p:to>
-                                        <p:strVal val="visible"/>
-                                      </p:to>
-                                    </p:set>
-                                  </p:childTnLst>
-                                </p:cTn>
-                              </p:par>
-                              <p:par>
-                                <p:cTn id="35" presetID="1" presetClass="entr" presetSubtype="0" fill="hold" grpId="0" nodeType="withEffect">
-                                  <p:stCondLst>
-                                    <p:cond delay="0"/>
-                                  </p:stCondLst>
-                                  <p:childTnLst>
-                                    <p:set>
-                                      <p:cBhvr>
-                                        <p:cTn id="36" dur="1" fill="hold">
-                                          <p:stCondLst>
-                                            <p:cond delay="0"/>
-                                          </p:stCondLst>
-                                        </p:cTn>
-                                        <p:tgtEl>
-                                          <p:spTgt spid="16"/>
-                                        </p:tgtEl>
-                                        <p:attrNameLst>
-                                          <p:attrName>style.visibility</p:attrName>
-                                        </p:attrNameLst>
-                                      </p:cBhvr>
-                                      <p:to>
-                                        <p:strVal val="visible"/>
-                                      </p:to>
-                                    </p:set>
-                                  </p:childTnLst>
-                                </p:cTn>
-                              </p:par>
-                            </p:childTnLst>
-                          </p:cTn>
-                        </p:par>
-                      </p:childTnLst>
-                    </p:cTn>
-                  </p:par>
-                  <p:par>
-                    <p:cTn id="37" fill="hold">
-                      <p:stCondLst>
-                        <p:cond delay="indefinite"/>
-                      </p:stCondLst>
-                      <p:childTnLst>
-                        <p:par>
-                          <p:cTn id="38" fill="hold">
-                            <p:stCondLst>
-                              <p:cond delay="0"/>
-                            </p:stCondLst>
-                            <p:childTnLst>
-                              <p:par>
-                                <p:cTn id="39" presetID="1" presetClass="entr" presetSubtype="0" fill="hold" grpId="0" nodeType="clickEffect">
-                                  <p:stCondLst>
-                                    <p:cond delay="0"/>
-                                  </p:stCondLst>
-                                  <p:childTnLst>
-                                    <p:set>
-                                      <p:cBhvr>
-                                        <p:cTn id="40" dur="1" fill="hold">
-                                          <p:stCondLst>
-                                            <p:cond delay="0"/>
-                                          </p:stCondLst>
-                                        </p:cTn>
-                                        <p:tgtEl>
-                                          <p:spTgt spid="17"/>
-                                        </p:tgtEl>
-                                        <p:attrNameLst>
-                                          <p:attrName>style.visibility</p:attrName>
-                                        </p:attrNameLst>
-                                      </p:cBhvr>
-                                      <p:to>
-                                        <p:strVal val="visible"/>
-                                      </p:to>
-                                    </p:set>
-                                  </p:childTnLst>
-                                </p:cTn>
-                              </p:par>
-                              <p:par>
-                                <p:cTn id="41" presetID="1" presetClass="entr" presetSubtype="0" fill="hold" grpId="0" nodeType="withEffect">
-                                  <p:stCondLst>
-                                    <p:cond delay="0"/>
-                                  </p:stCondLst>
-                                  <p:childTnLst>
-                                    <p:set>
-                                      <p:cBhvr>
-                                        <p:cTn id="42" dur="1" fill="hold">
-                                          <p:stCondLst>
-                                            <p:cond delay="0"/>
-                                          </p:stCondLst>
-                                        </p:cTn>
-                                        <p:tgtEl>
-                                          <p:spTgt spid="18"/>
-                                        </p:tgtEl>
-                                        <p:attrNameLst>
-                                          <p:attrName>style.visibility</p:attrName>
-                                        </p:attrNameLst>
-                                      </p:cBhvr>
-                                      <p:to>
-                                        <p:strVal val="visible"/>
-                                      </p:to>
-                                    </p:set>
-                                  </p:childTnLst>
-                                </p:cTn>
-                              </p:par>
-                            </p:childTnLst>
-                          </p:cTn>
-                        </p:par>
-                      </p:childTnLst>
-                    </p:cTn>
-                  </p:par>
-                </p:childTnLst>
-              </p:cTn>
-              <p:prevCondLst>
-                <p:cond evt="onPrev" delay="0">
-                  <p:tgtEl>
-                    <p:sldTgt/>
-                  </p:tgtEl>
-                </p:cond>
-              </p:prevCondLst>
-              <p:nextCondLst>
-                <p:cond evt="onNext" delay="0">
-                  <p:tgtEl>
-                    <p:sldTgt/>
-                  </p:tgtEl>
-                </p:cond>
-              </p:nextCondLst>
-            </p:seq>
-          </p:childTnLst>
-        </p:cTn>
-      </p:par>
-    </p:tnLst>
-    <p:bldLst>
-      <p:bldP spid="5" grpId="0" animBg="1"/>
-      <p:bldP spid="7" grpId="0" animBg="1"/>
-      <p:bldP spid="8" grpId="0" animBg="1"/>
-      <p:bldP spid="10" grpId="0" animBg="1"/>
-      <p:bldP spid="11" grpId="0" animBg="1"/>
-      <p:bldP spid="13" grpId="0" animBg="1"/>
-      <p:bldP spid="14" grpId="0" animBg="1"/>
-      <p:bldP spid="16" grpId="0" animBg="1"/>
-      <p:bldP spid="17" grpId="0" animBg="1"/>
-      <p:bldP spid="18" grpId="0" animBg="1"/>
     </p:bldLst>
   </p:timing>
 </p:sld>
